--- a/Presentations/Draft plots for myography trade-off work.pptx
+++ b/Presentations/Draft plots for myography trade-off work.pptx
@@ -5,27 +5,31 @@
     <p:sldMasterId id="2147483648" r:id="rId1"/>
   </p:sldMasterIdLst>
   <p:notesMasterIdLst>
-    <p:notesMasterId r:id="rId20"/>
+    <p:notesMasterId r:id="rId24"/>
   </p:notesMasterIdLst>
   <p:sldIdLst>
     <p:sldId id="274" r:id="rId2"/>
     <p:sldId id="256" r:id="rId3"/>
-    <p:sldId id="257" r:id="rId4"/>
-    <p:sldId id="258" r:id="rId5"/>
-    <p:sldId id="259" r:id="rId6"/>
-    <p:sldId id="261" r:id="rId7"/>
-    <p:sldId id="260" r:id="rId8"/>
-    <p:sldId id="262" r:id="rId9"/>
-    <p:sldId id="263" r:id="rId10"/>
-    <p:sldId id="264" r:id="rId11"/>
-    <p:sldId id="265" r:id="rId12"/>
-    <p:sldId id="272" r:id="rId13"/>
-    <p:sldId id="267" r:id="rId14"/>
-    <p:sldId id="271" r:id="rId15"/>
-    <p:sldId id="269" r:id="rId16"/>
-    <p:sldId id="268" r:id="rId17"/>
-    <p:sldId id="270" r:id="rId18"/>
-    <p:sldId id="273" r:id="rId19"/>
+    <p:sldId id="275" r:id="rId4"/>
+    <p:sldId id="257" r:id="rId5"/>
+    <p:sldId id="277" r:id="rId6"/>
+    <p:sldId id="258" r:id="rId7"/>
+    <p:sldId id="259" r:id="rId8"/>
+    <p:sldId id="261" r:id="rId9"/>
+    <p:sldId id="260" r:id="rId10"/>
+    <p:sldId id="262" r:id="rId11"/>
+    <p:sldId id="263" r:id="rId12"/>
+    <p:sldId id="264" r:id="rId13"/>
+    <p:sldId id="276" r:id="rId14"/>
+    <p:sldId id="265" r:id="rId15"/>
+    <p:sldId id="278" r:id="rId16"/>
+    <p:sldId id="272" r:id="rId17"/>
+    <p:sldId id="267" r:id="rId18"/>
+    <p:sldId id="271" r:id="rId19"/>
+    <p:sldId id="269" r:id="rId20"/>
+    <p:sldId id="268" r:id="rId21"/>
+    <p:sldId id="270" r:id="rId22"/>
+    <p:sldId id="273" r:id="rId23"/>
   </p:sldIdLst>
   <p:sldSz cx="12192000" cy="6858000"/>
   <p:notesSz cx="6858000" cy="9144000"/>
@@ -124,6 +128,11 @@
       </a:defRPr>
     </a:lvl9pPr>
   </p:defaultTextStyle>
+  <p:extLst>
+    <p:ext uri="{EFAFB233-063F-42B5-8137-9DF3F51BA10A}">
+      <p15:sldGuideLst xmlns:p15="http://schemas.microsoft.com/office/powerpoint/2012/main"/>
+    </p:ext>
+  </p:extLst>
 </p:presentation>
 </file>
 
@@ -209,7 +218,7 @@
           <a:p>
             <a:fld id="{3930ABBD-3C32-42F1-9CAF-983C4BE0028E}" type="datetimeFigureOut">
               <a:rPr lang="en-US" smtClean="0"/>
-              <a:t>6/7/2026</a:t>
+              <a:t>6/10/2026</a:t>
             </a:fld>
             <a:endParaRPr lang="en-US"/>
           </a:p>
@@ -544,7 +553,7 @@
           <a:p>
             <a:fld id="{F7EB3A0C-D451-48F2-9233-B0BC11E987C5}" type="slidenum">
               <a:rPr lang="en-US" smtClean="0"/>
-              <a:t>3</a:t>
+              <a:t>4</a:t>
             </a:fld>
             <a:endParaRPr lang="en-US"/>
           </a:p>
@@ -631,7 +640,7 @@
           <a:p>
             <a:fld id="{F7EB3A0C-D451-48F2-9233-B0BC11E987C5}" type="slidenum">
               <a:rPr lang="en-US" smtClean="0"/>
-              <a:t>13</a:t>
+              <a:t>17</a:t>
             </a:fld>
             <a:endParaRPr lang="en-US"/>
           </a:p>
@@ -723,7 +732,7 @@
           <a:p>
             <a:fld id="{F7EB3A0C-D451-48F2-9233-B0BC11E987C5}" type="slidenum">
               <a:rPr lang="en-US" smtClean="0"/>
-              <a:t>14</a:t>
+              <a:t>18</a:t>
             </a:fld>
             <a:endParaRPr lang="en-US"/>
           </a:p>
@@ -810,7 +819,7 @@
           <a:p>
             <a:fld id="{F7EB3A0C-D451-48F2-9233-B0BC11E987C5}" type="slidenum">
               <a:rPr lang="en-US" smtClean="0"/>
-              <a:t>15</a:t>
+              <a:t>19</a:t>
             </a:fld>
             <a:endParaRPr lang="en-US"/>
           </a:p>
@@ -897,7 +906,7 @@
           <a:p>
             <a:fld id="{F7EB3A0C-D451-48F2-9233-B0BC11E987C5}" type="slidenum">
               <a:rPr lang="en-US" smtClean="0"/>
-              <a:t>16</a:t>
+              <a:t>20</a:t>
             </a:fld>
             <a:endParaRPr lang="en-US"/>
           </a:p>
@@ -984,7 +993,7 @@
           <a:p>
             <a:fld id="{F7EB3A0C-D451-48F2-9233-B0BC11E987C5}" type="slidenum">
               <a:rPr lang="en-US" smtClean="0"/>
-              <a:t>17</a:t>
+              <a:t>21</a:t>
             </a:fld>
             <a:endParaRPr lang="en-US"/>
           </a:p>
@@ -1071,7 +1080,7 @@
           <a:p>
             <a:fld id="{F7EB3A0C-D451-48F2-9233-B0BC11E987C5}" type="slidenum">
               <a:rPr lang="en-US" smtClean="0"/>
-              <a:t>4</a:t>
+              <a:t>6</a:t>
             </a:fld>
             <a:endParaRPr lang="en-US"/>
           </a:p>
@@ -1178,7 +1187,7 @@
           <a:p>
             <a:fld id="{F7EB3A0C-D451-48F2-9233-B0BC11E987C5}" type="slidenum">
               <a:rPr lang="en-US" smtClean="0"/>
-              <a:t>5</a:t>
+              <a:t>7</a:t>
             </a:fld>
             <a:endParaRPr lang="en-US"/>
           </a:p>
@@ -1290,7 +1299,7 @@
           <a:p>
             <a:fld id="{F7EB3A0C-D451-48F2-9233-B0BC11E987C5}" type="slidenum">
               <a:rPr lang="en-US" smtClean="0"/>
-              <a:t>6</a:t>
+              <a:t>8</a:t>
             </a:fld>
             <a:endParaRPr lang="en-US"/>
           </a:p>
@@ -1385,7 +1394,7 @@
           <a:p>
             <a:fld id="{F7EB3A0C-D451-48F2-9233-B0BC11E987C5}" type="slidenum">
               <a:rPr lang="en-US" smtClean="0"/>
-              <a:t>7</a:t>
+              <a:t>9</a:t>
             </a:fld>
             <a:endParaRPr lang="en-US"/>
           </a:p>
@@ -1472,7 +1481,7 @@
           <a:p>
             <a:fld id="{F7EB3A0C-D451-48F2-9233-B0BC11E987C5}" type="slidenum">
               <a:rPr lang="en-US" smtClean="0"/>
-              <a:t>8</a:t>
+              <a:t>10</a:t>
             </a:fld>
             <a:endParaRPr lang="en-US"/>
           </a:p>
@@ -1559,7 +1568,7 @@
           <a:p>
             <a:fld id="{F7EB3A0C-D451-48F2-9233-B0BC11E987C5}" type="slidenum">
               <a:rPr lang="en-US" smtClean="0"/>
-              <a:t>9</a:t>
+              <a:t>11</a:t>
             </a:fld>
             <a:endParaRPr lang="en-US"/>
           </a:p>
@@ -1646,7 +1655,7 @@
           <a:p>
             <a:fld id="{F7EB3A0C-D451-48F2-9233-B0BC11E987C5}" type="slidenum">
               <a:rPr lang="en-US" smtClean="0"/>
-              <a:t>11</a:t>
+              <a:t>14</a:t>
             </a:fld>
             <a:endParaRPr lang="en-US"/>
           </a:p>
@@ -1741,7 +1750,7 @@
           <a:p>
             <a:fld id="{F7EB3A0C-D451-48F2-9233-B0BC11E987C5}" type="slidenum">
               <a:rPr lang="en-US" smtClean="0"/>
-              <a:t>12</a:t>
+              <a:t>16</a:t>
             </a:fld>
             <a:endParaRPr lang="en-US"/>
           </a:p>
@@ -1907,7 +1916,7 @@
           <a:p>
             <a:fld id="{8D0B3E90-267C-48FC-B90C-EF83BC81CA30}" type="datetimeFigureOut">
               <a:rPr lang="en-US" smtClean="0"/>
-              <a:t>6/7/2026</a:t>
+              <a:t>6/10/2026</a:t>
             </a:fld>
             <a:endParaRPr lang="en-US"/>
           </a:p>
@@ -2105,7 +2114,7 @@
           <a:p>
             <a:fld id="{8D0B3E90-267C-48FC-B90C-EF83BC81CA30}" type="datetimeFigureOut">
               <a:rPr lang="en-US" smtClean="0"/>
-              <a:t>6/7/2026</a:t>
+              <a:t>6/10/2026</a:t>
             </a:fld>
             <a:endParaRPr lang="en-US"/>
           </a:p>
@@ -2313,7 +2322,7 @@
           <a:p>
             <a:fld id="{8D0B3E90-267C-48FC-B90C-EF83BC81CA30}" type="datetimeFigureOut">
               <a:rPr lang="en-US" smtClean="0"/>
-              <a:t>6/7/2026</a:t>
+              <a:t>6/10/2026</a:t>
             </a:fld>
             <a:endParaRPr lang="en-US"/>
           </a:p>
@@ -2511,7 +2520,7 @@
           <a:p>
             <a:fld id="{8D0B3E90-267C-48FC-B90C-EF83BC81CA30}" type="datetimeFigureOut">
               <a:rPr lang="en-US" smtClean="0"/>
-              <a:t>6/7/2026</a:t>
+              <a:t>6/10/2026</a:t>
             </a:fld>
             <a:endParaRPr lang="en-US"/>
           </a:p>
@@ -2786,7 +2795,7 @@
           <a:p>
             <a:fld id="{8D0B3E90-267C-48FC-B90C-EF83BC81CA30}" type="datetimeFigureOut">
               <a:rPr lang="en-US" smtClean="0"/>
-              <a:t>6/7/2026</a:t>
+              <a:t>6/10/2026</a:t>
             </a:fld>
             <a:endParaRPr lang="en-US"/>
           </a:p>
@@ -3051,7 +3060,7 @@
           <a:p>
             <a:fld id="{8D0B3E90-267C-48FC-B90C-EF83BC81CA30}" type="datetimeFigureOut">
               <a:rPr lang="en-US" smtClean="0"/>
-              <a:t>6/7/2026</a:t>
+              <a:t>6/10/2026</a:t>
             </a:fld>
             <a:endParaRPr lang="en-US"/>
           </a:p>
@@ -3463,7 +3472,7 @@
           <a:p>
             <a:fld id="{8D0B3E90-267C-48FC-B90C-EF83BC81CA30}" type="datetimeFigureOut">
               <a:rPr lang="en-US" smtClean="0"/>
-              <a:t>6/7/2026</a:t>
+              <a:t>6/10/2026</a:t>
             </a:fld>
             <a:endParaRPr lang="en-US"/>
           </a:p>
@@ -3604,7 +3613,7 @@
           <a:p>
             <a:fld id="{8D0B3E90-267C-48FC-B90C-EF83BC81CA30}" type="datetimeFigureOut">
               <a:rPr lang="en-US" smtClean="0"/>
-              <a:t>6/7/2026</a:t>
+              <a:t>6/10/2026</a:t>
             </a:fld>
             <a:endParaRPr lang="en-US"/>
           </a:p>
@@ -3717,7 +3726,7 @@
           <a:p>
             <a:fld id="{8D0B3E90-267C-48FC-B90C-EF83BC81CA30}" type="datetimeFigureOut">
               <a:rPr lang="en-US" smtClean="0"/>
-              <a:t>6/7/2026</a:t>
+              <a:t>6/10/2026</a:t>
             </a:fld>
             <a:endParaRPr lang="en-US"/>
           </a:p>
@@ -4028,7 +4037,7 @@
           <a:p>
             <a:fld id="{8D0B3E90-267C-48FC-B90C-EF83BC81CA30}" type="datetimeFigureOut">
               <a:rPr lang="en-US" smtClean="0"/>
-              <a:t>6/7/2026</a:t>
+              <a:t>6/10/2026</a:t>
             </a:fld>
             <a:endParaRPr lang="en-US"/>
           </a:p>
@@ -4316,7 +4325,7 @@
           <a:p>
             <a:fld id="{8D0B3E90-267C-48FC-B90C-EF83BC81CA30}" type="datetimeFigureOut">
               <a:rPr lang="en-US" smtClean="0"/>
-              <a:t>6/7/2026</a:t>
+              <a:t>6/10/2026</a:t>
             </a:fld>
             <a:endParaRPr lang="en-US"/>
           </a:p>
@@ -4557,7 +4566,7 @@
           <a:p>
             <a:fld id="{8D0B3E90-267C-48FC-B90C-EF83BC81CA30}" type="datetimeFigureOut">
               <a:rPr lang="en-US" smtClean="0"/>
-              <a:t>6/7/2026</a:t>
+              <a:t>6/10/2026</a:t>
             </a:fld>
             <a:endParaRPr lang="en-US"/>
           </a:p>
@@ -5045,1503 +5054,6 @@
   <p:cSld>
     <p:spTree>
       <p:nvGrpSpPr>
-        <p:cNvPr id="1" name=""/>
-        <p:cNvGrpSpPr/>
-        <p:nvPr/>
-      </p:nvGrpSpPr>
-      <p:grpSpPr>
-        <a:xfrm>
-          <a:off x="0" y="0"/>
-          <a:ext cx="0" cy="0"/>
-          <a:chOff x="0" y="0"/>
-          <a:chExt cx="0" cy="0"/>
-        </a:xfrm>
-      </p:grpSpPr>
-      <p:sp>
-        <p:nvSpPr>
-          <p:cNvPr id="2" name="Title 1">
-            <a:extLst>
-              <a:ext uri="{FF2B5EF4-FFF2-40B4-BE49-F238E27FC236}">
-                <a16:creationId xmlns:a16="http://schemas.microsoft.com/office/drawing/2014/main" id="{F22E7229-A7F7-248B-E6F8-BE83DB34ADB7}"/>
-              </a:ext>
-            </a:extLst>
-          </p:cNvPr>
-          <p:cNvSpPr>
-            <a:spLocks noGrp="1"/>
-          </p:cNvSpPr>
-          <p:nvPr>
-            <p:ph type="title"/>
-          </p:nvPr>
-        </p:nvSpPr>
-        <p:spPr/>
-        <p:txBody>
-          <a:bodyPr/>
-          <a:lstStyle/>
-          <a:p>
-            <a:r>
-              <a:rPr lang="en-US" dirty="0"/>
-              <a:t>Tetanic contractions (tetanus)</a:t>
-            </a:r>
-          </a:p>
-        </p:txBody>
-      </p:sp>
-      <p:sp>
-        <p:nvSpPr>
-          <p:cNvPr id="3" name="Text Placeholder 2">
-            <a:extLst>
-              <a:ext uri="{FF2B5EF4-FFF2-40B4-BE49-F238E27FC236}">
-                <a16:creationId xmlns:a16="http://schemas.microsoft.com/office/drawing/2014/main" id="{3A446006-E94C-5109-981F-0EE1E9215759}"/>
-              </a:ext>
-            </a:extLst>
-          </p:cNvPr>
-          <p:cNvSpPr>
-            <a:spLocks noGrp="1"/>
-          </p:cNvSpPr>
-          <p:nvPr>
-            <p:ph type="body" idx="1"/>
-          </p:nvPr>
-        </p:nvSpPr>
-        <p:spPr/>
-        <p:txBody>
-          <a:bodyPr/>
-          <a:lstStyle/>
-          <a:p>
-            <a:r>
-              <a:rPr lang="en-US" dirty="0"/>
-              <a:t>Same note about the colors, apologies that they’re all wonky again</a:t>
-            </a:r>
-          </a:p>
-        </p:txBody>
-      </p:sp>
-    </p:spTree>
-    <p:extLst>
-      <p:ext uri="{BB962C8B-B14F-4D97-AF65-F5344CB8AC3E}">
-        <p14:creationId xmlns:p14="http://schemas.microsoft.com/office/powerpoint/2010/main" val="1388248658"/>
-      </p:ext>
-    </p:extLst>
-  </p:cSld>
-  <p:clrMapOvr>
-    <a:masterClrMapping/>
-  </p:clrMapOvr>
-</p:sld>
-</file>
-
-<file path=ppt/slides/slide11.xml><?xml version="1.0" encoding="utf-8"?>
-<p:sld xmlns:a="http://schemas.openxmlformats.org/drawingml/2006/main" xmlns:r="http://schemas.openxmlformats.org/officeDocument/2006/relationships" xmlns:p="http://schemas.openxmlformats.org/presentationml/2006/main">
-  <p:cSld>
-    <p:spTree>
-      <p:nvGrpSpPr>
-        <p:cNvPr id="1" name=""/>
-        <p:cNvGrpSpPr/>
-        <p:nvPr/>
-      </p:nvGrpSpPr>
-      <p:grpSpPr>
-        <a:xfrm>
-          <a:off x="0" y="0"/>
-          <a:ext cx="0" cy="0"/>
-          <a:chOff x="0" y="0"/>
-          <a:chExt cx="0" cy="0"/>
-        </a:xfrm>
-      </p:grpSpPr>
-      <p:pic>
-        <p:nvPicPr>
-          <p:cNvPr id="18" name="Picture 17">
-            <a:extLst>
-              <a:ext uri="{FF2B5EF4-FFF2-40B4-BE49-F238E27FC236}">
-                <a16:creationId xmlns:a16="http://schemas.microsoft.com/office/drawing/2014/main" id="{3D69B59F-D994-2285-6033-2FB458B34C42}"/>
-              </a:ext>
-            </a:extLst>
-          </p:cNvPr>
-          <p:cNvPicPr>
-            <a:picLocks noChangeAspect="1"/>
-          </p:cNvPicPr>
-          <p:nvPr/>
-        </p:nvPicPr>
-        <p:blipFill>
-          <a:blip r:embed="rId3">
-            <a:extLst>
-              <a:ext uri="{28A0092B-C50C-407E-A947-70E740481C1C}">
-                <a14:useLocalDpi xmlns:a14="http://schemas.microsoft.com/office/drawing/2010/main" val="0"/>
-              </a:ext>
-            </a:extLst>
-          </a:blip>
-          <a:stretch>
-            <a:fillRect/>
-          </a:stretch>
-        </p:blipFill>
-        <p:spPr>
-          <a:xfrm>
-            <a:off x="1746667" y="239641"/>
-            <a:ext cx="7702133" cy="6378718"/>
-          </a:xfrm>
-          <a:prstGeom prst="rect">
-            <a:avLst/>
-          </a:prstGeom>
-        </p:spPr>
-      </p:pic>
-    </p:spTree>
-    <p:extLst>
-      <p:ext uri="{BB962C8B-B14F-4D97-AF65-F5344CB8AC3E}">
-        <p14:creationId xmlns:p14="http://schemas.microsoft.com/office/powerpoint/2010/main" val="1887341186"/>
-      </p:ext>
-    </p:extLst>
-  </p:cSld>
-  <p:clrMapOvr>
-    <a:masterClrMapping/>
-  </p:clrMapOvr>
-</p:sld>
-</file>
-
-<file path=ppt/slides/slide12.xml><?xml version="1.0" encoding="utf-8"?>
-<p:sld xmlns:a="http://schemas.openxmlformats.org/drawingml/2006/main" xmlns:r="http://schemas.openxmlformats.org/officeDocument/2006/relationships" xmlns:p="http://schemas.openxmlformats.org/presentationml/2006/main">
-  <p:cSld>
-    <p:spTree>
-      <p:nvGrpSpPr>
-        <p:cNvPr id="1" name="">
-          <a:extLst>
-            <a:ext uri="{FF2B5EF4-FFF2-40B4-BE49-F238E27FC236}">
-              <a16:creationId xmlns:a16="http://schemas.microsoft.com/office/drawing/2014/main" id="{E0D1D141-BF55-6CFA-D0D4-E2DF47FE6C02}"/>
-            </a:ext>
-          </a:extLst>
-        </p:cNvPr>
-        <p:cNvGrpSpPr/>
-        <p:nvPr/>
-      </p:nvGrpSpPr>
-      <p:grpSpPr>
-        <a:xfrm>
-          <a:off x="0" y="0"/>
-          <a:ext cx="0" cy="0"/>
-          <a:chOff x="0" y="0"/>
-          <a:chExt cx="0" cy="0"/>
-        </a:xfrm>
-      </p:grpSpPr>
-      <p:sp>
-        <p:nvSpPr>
-          <p:cNvPr id="4" name="Title 3">
-            <a:extLst>
-              <a:ext uri="{FF2B5EF4-FFF2-40B4-BE49-F238E27FC236}">
-                <a16:creationId xmlns:a16="http://schemas.microsoft.com/office/drawing/2014/main" id="{F742240D-C979-78B2-8631-D9A15E3CC603}"/>
-              </a:ext>
-            </a:extLst>
-          </p:cNvPr>
-          <p:cNvSpPr>
-            <a:spLocks noGrp="1"/>
-          </p:cNvSpPr>
-          <p:nvPr>
-            <p:ph type="title"/>
-          </p:nvPr>
-        </p:nvSpPr>
-        <p:spPr>
-          <a:xfrm>
-            <a:off x="159774" y="70158"/>
-            <a:ext cx="10515600" cy="1325563"/>
-          </a:xfrm>
-        </p:spPr>
-        <p:txBody>
-          <a:bodyPr/>
-          <a:lstStyle/>
-          <a:p>
-            <a:r>
-              <a:rPr lang="en-US" dirty="0"/>
-              <a:t>LVNV, T, and WT sirtalis</a:t>
-            </a:r>
-          </a:p>
-        </p:txBody>
-      </p:sp>
-      <p:pic>
-        <p:nvPicPr>
-          <p:cNvPr id="16" name="Picture 15">
-            <a:extLst>
-              <a:ext uri="{FF2B5EF4-FFF2-40B4-BE49-F238E27FC236}">
-                <a16:creationId xmlns:a16="http://schemas.microsoft.com/office/drawing/2014/main" id="{0FAC8C6F-5236-4C3D-4ADB-86FFAE71D67C}"/>
-              </a:ext>
-            </a:extLst>
-          </p:cNvPr>
-          <p:cNvPicPr>
-            <a:picLocks noChangeAspect="1"/>
-          </p:cNvPicPr>
-          <p:nvPr/>
-        </p:nvPicPr>
-        <p:blipFill>
-          <a:blip r:embed="rId3">
-            <a:extLst>
-              <a:ext uri="{28A0092B-C50C-407E-A947-70E740481C1C}">
-                <a14:useLocalDpi xmlns:a14="http://schemas.microsoft.com/office/drawing/2010/main" val="0"/>
-              </a:ext>
-            </a:extLst>
-          </a:blip>
-          <a:stretch>
-            <a:fillRect/>
-          </a:stretch>
-        </p:blipFill>
-        <p:spPr>
-          <a:xfrm>
-            <a:off x="2796533" y="1155851"/>
-            <a:ext cx="6598933" cy="5465075"/>
-          </a:xfrm>
-          <a:prstGeom prst="rect">
-            <a:avLst/>
-          </a:prstGeom>
-        </p:spPr>
-      </p:pic>
-    </p:spTree>
-    <p:extLst>
-      <p:ext uri="{BB962C8B-B14F-4D97-AF65-F5344CB8AC3E}">
-        <p14:creationId xmlns:p14="http://schemas.microsoft.com/office/powerpoint/2010/main" val="701903127"/>
-      </p:ext>
-    </p:extLst>
-  </p:cSld>
-  <p:clrMapOvr>
-    <a:masterClrMapping/>
-  </p:clrMapOvr>
-</p:sld>
-</file>
-
-<file path=ppt/slides/slide13.xml><?xml version="1.0" encoding="utf-8"?>
-<p:sld xmlns:a="http://schemas.openxmlformats.org/drawingml/2006/main" xmlns:r="http://schemas.openxmlformats.org/officeDocument/2006/relationships" xmlns:p="http://schemas.openxmlformats.org/presentationml/2006/main">
-  <p:cSld>
-    <p:spTree>
-      <p:nvGrpSpPr>
-        <p:cNvPr id="1" name="">
-          <a:extLst>
-            <a:ext uri="{FF2B5EF4-FFF2-40B4-BE49-F238E27FC236}">
-              <a16:creationId xmlns:a16="http://schemas.microsoft.com/office/drawing/2014/main" id="{F49B1AFC-8B86-2BEB-43D5-CB26CC07E4D1}"/>
-            </a:ext>
-          </a:extLst>
-        </p:cNvPr>
-        <p:cNvGrpSpPr/>
-        <p:nvPr/>
-      </p:nvGrpSpPr>
-      <p:grpSpPr>
-        <a:xfrm>
-          <a:off x="0" y="0"/>
-          <a:ext cx="0" cy="0"/>
-          <a:chOff x="0" y="0"/>
-          <a:chExt cx="0" cy="0"/>
-        </a:xfrm>
-      </p:grpSpPr>
-      <p:sp>
-        <p:nvSpPr>
-          <p:cNvPr id="4" name="Title 3">
-            <a:extLst>
-              <a:ext uri="{FF2B5EF4-FFF2-40B4-BE49-F238E27FC236}">
-                <a16:creationId xmlns:a16="http://schemas.microsoft.com/office/drawing/2014/main" id="{427A2538-AA41-71FA-61B6-FE951563DB19}"/>
-              </a:ext>
-            </a:extLst>
-          </p:cNvPr>
-          <p:cNvSpPr>
-            <a:spLocks noGrp="1"/>
-          </p:cNvSpPr>
-          <p:nvPr>
-            <p:ph type="title"/>
-          </p:nvPr>
-        </p:nvSpPr>
-        <p:spPr>
-          <a:xfrm>
-            <a:off x="81116" y="0"/>
-            <a:ext cx="10515600" cy="1325563"/>
-          </a:xfrm>
-        </p:spPr>
-        <p:txBody>
-          <a:bodyPr/>
-          <a:lstStyle/>
-          <a:p>
-            <a:r>
-              <a:rPr lang="en-US" dirty="0"/>
-              <a:t>LVNV, EPN, T, and WT sirtalis</a:t>
-            </a:r>
-          </a:p>
-        </p:txBody>
-      </p:sp>
-      <p:pic>
-        <p:nvPicPr>
-          <p:cNvPr id="6" name="Picture 5">
-            <a:extLst>
-              <a:ext uri="{FF2B5EF4-FFF2-40B4-BE49-F238E27FC236}">
-                <a16:creationId xmlns:a16="http://schemas.microsoft.com/office/drawing/2014/main" id="{EC278E12-1BA9-99C0-B3E6-FDB4D1AF1D09}"/>
-              </a:ext>
-            </a:extLst>
-          </p:cNvPr>
-          <p:cNvPicPr>
-            <a:picLocks noChangeAspect="1"/>
-          </p:cNvPicPr>
-          <p:nvPr/>
-        </p:nvPicPr>
-        <p:blipFill>
-          <a:blip r:embed="rId3">
-            <a:extLst>
-              <a:ext uri="{28A0092B-C50C-407E-A947-70E740481C1C}">
-                <a14:useLocalDpi xmlns:a14="http://schemas.microsoft.com/office/drawing/2010/main" val="0"/>
-              </a:ext>
-            </a:extLst>
-          </a:blip>
-          <a:stretch>
-            <a:fillRect/>
-          </a:stretch>
-        </p:blipFill>
-        <p:spPr>
-          <a:xfrm>
-            <a:off x="2602718" y="1001263"/>
-            <a:ext cx="6986564" cy="5786102"/>
-          </a:xfrm>
-          <a:prstGeom prst="rect">
-            <a:avLst/>
-          </a:prstGeom>
-        </p:spPr>
-      </p:pic>
-    </p:spTree>
-    <p:extLst>
-      <p:ext uri="{BB962C8B-B14F-4D97-AF65-F5344CB8AC3E}">
-        <p14:creationId xmlns:p14="http://schemas.microsoft.com/office/powerpoint/2010/main" val="2024328479"/>
-      </p:ext>
-    </p:extLst>
-  </p:cSld>
-  <p:clrMapOvr>
-    <a:masterClrMapping/>
-  </p:clrMapOvr>
-</p:sld>
-</file>
-
-<file path=ppt/slides/slide14.xml><?xml version="1.0" encoding="utf-8"?>
-<p:sld xmlns:a="http://schemas.openxmlformats.org/drawingml/2006/main" xmlns:r="http://schemas.openxmlformats.org/officeDocument/2006/relationships" xmlns:p="http://schemas.openxmlformats.org/presentationml/2006/main">
-  <p:cSld>
-    <p:spTree>
-      <p:nvGrpSpPr>
-        <p:cNvPr id="1" name="">
-          <a:extLst>
-            <a:ext uri="{FF2B5EF4-FFF2-40B4-BE49-F238E27FC236}">
-              <a16:creationId xmlns:a16="http://schemas.microsoft.com/office/drawing/2014/main" id="{BA3FE163-3652-8D85-7226-16BF78E94D3B}"/>
-            </a:ext>
-          </a:extLst>
-        </p:cNvPr>
-        <p:cNvGrpSpPr/>
-        <p:nvPr/>
-      </p:nvGrpSpPr>
-      <p:grpSpPr>
-        <a:xfrm>
-          <a:off x="0" y="0"/>
-          <a:ext cx="0" cy="0"/>
-          <a:chOff x="0" y="0"/>
-          <a:chExt cx="0" cy="0"/>
-        </a:xfrm>
-      </p:grpSpPr>
-      <p:sp>
-        <p:nvSpPr>
-          <p:cNvPr id="4" name="Title 3">
-            <a:extLst>
-              <a:ext uri="{FF2B5EF4-FFF2-40B4-BE49-F238E27FC236}">
-                <a16:creationId xmlns:a16="http://schemas.microsoft.com/office/drawing/2014/main" id="{933E5EC4-F47F-D7DB-6D35-53F8B9280C63}"/>
-              </a:ext>
-            </a:extLst>
-          </p:cNvPr>
-          <p:cNvSpPr>
-            <a:spLocks noGrp="1"/>
-          </p:cNvSpPr>
-          <p:nvPr>
-            <p:ph type="title"/>
-          </p:nvPr>
-        </p:nvSpPr>
-        <p:spPr>
-          <a:xfrm>
-            <a:off x="90948" y="67362"/>
-            <a:ext cx="10515600" cy="1325563"/>
-          </a:xfrm>
-        </p:spPr>
-        <p:txBody>
-          <a:bodyPr/>
-          <a:lstStyle/>
-          <a:p>
-            <a:r>
-              <a:rPr lang="en-US" dirty="0"/>
-              <a:t>LVNV, WT sirtalis, T, and WT </a:t>
-            </a:r>
-            <a:r>
-              <a:rPr lang="en-US" dirty="0" err="1"/>
-              <a:t>hammondii</a:t>
-            </a:r>
-            <a:endParaRPr lang="en-US" dirty="0"/>
-          </a:p>
-        </p:txBody>
-      </p:sp>
-      <p:pic>
-        <p:nvPicPr>
-          <p:cNvPr id="14" name="Picture 13">
-            <a:extLst>
-              <a:ext uri="{FF2B5EF4-FFF2-40B4-BE49-F238E27FC236}">
-                <a16:creationId xmlns:a16="http://schemas.microsoft.com/office/drawing/2014/main" id="{B7A2896C-40EB-5300-6D87-E0679A1C4924}"/>
-              </a:ext>
-            </a:extLst>
-          </p:cNvPr>
-          <p:cNvPicPr>
-            <a:picLocks noChangeAspect="1"/>
-          </p:cNvPicPr>
-          <p:nvPr/>
-        </p:nvPicPr>
-        <p:blipFill>
-          <a:blip r:embed="rId3">
-            <a:extLst>
-              <a:ext uri="{28A0092B-C50C-407E-A947-70E740481C1C}">
-                <a14:useLocalDpi xmlns:a14="http://schemas.microsoft.com/office/drawing/2010/main" val="0"/>
-              </a:ext>
-            </a:extLst>
-          </a:blip>
-          <a:stretch>
-            <a:fillRect/>
-          </a:stretch>
-        </p:blipFill>
-        <p:spPr>
-          <a:xfrm>
-            <a:off x="2796533" y="1325563"/>
-            <a:ext cx="6598933" cy="5465075"/>
-          </a:xfrm>
-          <a:prstGeom prst="rect">
-            <a:avLst/>
-          </a:prstGeom>
-        </p:spPr>
-      </p:pic>
-    </p:spTree>
-    <p:extLst>
-      <p:ext uri="{BB962C8B-B14F-4D97-AF65-F5344CB8AC3E}">
-        <p14:creationId xmlns:p14="http://schemas.microsoft.com/office/powerpoint/2010/main" val="2130636375"/>
-      </p:ext>
-    </p:extLst>
-  </p:cSld>
-  <p:clrMapOvr>
-    <a:masterClrMapping/>
-  </p:clrMapOvr>
-</p:sld>
-</file>
-
-<file path=ppt/slides/slide15.xml><?xml version="1.0" encoding="utf-8"?>
-<p:sld xmlns:a="http://schemas.openxmlformats.org/drawingml/2006/main" xmlns:r="http://schemas.openxmlformats.org/officeDocument/2006/relationships" xmlns:p="http://schemas.openxmlformats.org/presentationml/2006/main">
-  <p:cSld>
-    <p:spTree>
-      <p:nvGrpSpPr>
-        <p:cNvPr id="1" name="">
-          <a:extLst>
-            <a:ext uri="{FF2B5EF4-FFF2-40B4-BE49-F238E27FC236}">
-              <a16:creationId xmlns:a16="http://schemas.microsoft.com/office/drawing/2014/main" id="{F001F2E3-B7FE-BC9A-D078-26F4DE252C7F}"/>
-            </a:ext>
-          </a:extLst>
-        </p:cNvPr>
-        <p:cNvGrpSpPr/>
-        <p:nvPr/>
-      </p:nvGrpSpPr>
-      <p:grpSpPr>
-        <a:xfrm>
-          <a:off x="0" y="0"/>
-          <a:ext cx="0" cy="0"/>
-          <a:chOff x="0" y="0"/>
-          <a:chExt cx="0" cy="0"/>
-        </a:xfrm>
-      </p:grpSpPr>
-      <p:pic>
-        <p:nvPicPr>
-          <p:cNvPr id="8" name="Picture 7">
-            <a:extLst>
-              <a:ext uri="{FF2B5EF4-FFF2-40B4-BE49-F238E27FC236}">
-                <a16:creationId xmlns:a16="http://schemas.microsoft.com/office/drawing/2014/main" id="{38A6683D-0A4C-6246-BAEE-57F47B38BC00}"/>
-              </a:ext>
-            </a:extLst>
-          </p:cNvPr>
-          <p:cNvPicPr>
-            <a:picLocks noChangeAspect="1"/>
-          </p:cNvPicPr>
-          <p:nvPr/>
-        </p:nvPicPr>
-        <p:blipFill>
-          <a:blip r:embed="rId3">
-            <a:extLst>
-              <a:ext uri="{28A0092B-C50C-407E-A947-70E740481C1C}">
-                <a14:useLocalDpi xmlns:a14="http://schemas.microsoft.com/office/drawing/2010/main" val="0"/>
-              </a:ext>
-            </a:extLst>
-          </a:blip>
-          <a:stretch>
-            <a:fillRect/>
-          </a:stretch>
-        </p:blipFill>
-        <p:spPr>
-          <a:xfrm>
-            <a:off x="2425422" y="1016982"/>
-            <a:ext cx="7052874" cy="5841018"/>
-          </a:xfrm>
-          <a:prstGeom prst="rect">
-            <a:avLst/>
-          </a:prstGeom>
-        </p:spPr>
-      </p:pic>
-      <p:sp>
-        <p:nvSpPr>
-          <p:cNvPr id="2" name="Title 3">
-            <a:extLst>
-              <a:ext uri="{FF2B5EF4-FFF2-40B4-BE49-F238E27FC236}">
-                <a16:creationId xmlns:a16="http://schemas.microsoft.com/office/drawing/2014/main" id="{0F526DD4-1F02-90A2-21E1-F5ED9FF065F5}"/>
-              </a:ext>
-            </a:extLst>
-          </p:cNvPr>
-          <p:cNvSpPr txBox="1">
-            <a:spLocks/>
-          </p:cNvSpPr>
-          <p:nvPr/>
-        </p:nvSpPr>
-        <p:spPr>
-          <a:xfrm>
-            <a:off x="90948" y="67362"/>
-            <a:ext cx="10515600" cy="1325563"/>
-          </a:xfrm>
-          <a:prstGeom prst="rect">
-            <a:avLst/>
-          </a:prstGeom>
-        </p:spPr>
-        <p:txBody>
-          <a:bodyPr vert="horz" lIns="91440" tIns="45720" rIns="91440" bIns="45720" rtlCol="0" anchor="ctr">
-            <a:normAutofit/>
-          </a:bodyPr>
-          <a:lstStyle>
-            <a:lvl1pPr algn="l" defTabSz="914400" rtl="0" eaLnBrk="1" latinLnBrk="0" hangingPunct="1">
-              <a:lnSpc>
-                <a:spcPct val="90000"/>
-              </a:lnSpc>
-              <a:spcBef>
-                <a:spcPct val="0"/>
-              </a:spcBef>
-              <a:buNone/>
-              <a:defRPr sz="4400" kern="1200">
-                <a:solidFill>
-                  <a:schemeClr val="tx1"/>
-                </a:solidFill>
-                <a:latin typeface="+mj-lt"/>
-                <a:ea typeface="+mj-ea"/>
-                <a:cs typeface="+mj-cs"/>
-              </a:defRPr>
-            </a:lvl1pPr>
-          </a:lstStyle>
-          <a:p>
-            <a:r>
-              <a:rPr lang="en-US"/>
-              <a:t>LVNV, WT sirtalis, T, and WT hammondii</a:t>
-            </a:r>
-            <a:endParaRPr lang="en-US" dirty="0"/>
-          </a:p>
-        </p:txBody>
-      </p:sp>
-    </p:spTree>
-    <p:extLst>
-      <p:ext uri="{BB962C8B-B14F-4D97-AF65-F5344CB8AC3E}">
-        <p14:creationId xmlns:p14="http://schemas.microsoft.com/office/powerpoint/2010/main" val="2730062183"/>
-      </p:ext>
-    </p:extLst>
-  </p:cSld>
-  <p:clrMapOvr>
-    <a:masterClrMapping/>
-  </p:clrMapOvr>
-</p:sld>
-</file>
-
-<file path=ppt/slides/slide16.xml><?xml version="1.0" encoding="utf-8"?>
-<p:sld xmlns:a="http://schemas.openxmlformats.org/drawingml/2006/main" xmlns:r="http://schemas.openxmlformats.org/officeDocument/2006/relationships" xmlns:p="http://schemas.openxmlformats.org/presentationml/2006/main">
-  <p:cSld>
-    <p:spTree>
-      <p:nvGrpSpPr>
-        <p:cNvPr id="1" name="">
-          <a:extLst>
-            <a:ext uri="{FF2B5EF4-FFF2-40B4-BE49-F238E27FC236}">
-              <a16:creationId xmlns:a16="http://schemas.microsoft.com/office/drawing/2014/main" id="{4460BEC3-72FD-0E53-909F-5F535746AA26}"/>
-            </a:ext>
-          </a:extLst>
-        </p:cNvPr>
-        <p:cNvGrpSpPr/>
-        <p:nvPr/>
-      </p:nvGrpSpPr>
-      <p:grpSpPr>
-        <a:xfrm>
-          <a:off x="0" y="0"/>
-          <a:ext cx="0" cy="0"/>
-          <a:chOff x="0" y="0"/>
-          <a:chExt cx="0" cy="0"/>
-        </a:xfrm>
-      </p:grpSpPr>
-      <p:pic>
-        <p:nvPicPr>
-          <p:cNvPr id="10" name="Picture 9">
-            <a:extLst>
-              <a:ext uri="{FF2B5EF4-FFF2-40B4-BE49-F238E27FC236}">
-                <a16:creationId xmlns:a16="http://schemas.microsoft.com/office/drawing/2014/main" id="{B8DFD697-9042-586E-5236-022A5816D0AB}"/>
-              </a:ext>
-            </a:extLst>
-          </p:cNvPr>
-          <p:cNvPicPr>
-            <a:picLocks noChangeAspect="1"/>
-          </p:cNvPicPr>
-          <p:nvPr/>
-        </p:nvPicPr>
-        <p:blipFill>
-          <a:blip r:embed="rId3">
-            <a:extLst>
-              <a:ext uri="{28A0092B-C50C-407E-A947-70E740481C1C}">
-                <a14:useLocalDpi xmlns:a14="http://schemas.microsoft.com/office/drawing/2010/main" val="0"/>
-              </a:ext>
-            </a:extLst>
-          </a:blip>
-          <a:stretch>
-            <a:fillRect/>
-          </a:stretch>
-        </p:blipFill>
-        <p:spPr>
-          <a:xfrm>
-            <a:off x="2870391" y="1124280"/>
-            <a:ext cx="6598933" cy="5465075"/>
-          </a:xfrm>
-          <a:prstGeom prst="rect">
-            <a:avLst/>
-          </a:prstGeom>
-        </p:spPr>
-      </p:pic>
-      <p:sp>
-        <p:nvSpPr>
-          <p:cNvPr id="2" name="Title 3">
-            <a:extLst>
-              <a:ext uri="{FF2B5EF4-FFF2-40B4-BE49-F238E27FC236}">
-                <a16:creationId xmlns:a16="http://schemas.microsoft.com/office/drawing/2014/main" id="{F513DE2B-F1AD-A55F-C524-CAAE9815B878}"/>
-              </a:ext>
-            </a:extLst>
-          </p:cNvPr>
-          <p:cNvSpPr txBox="1">
-            <a:spLocks/>
-          </p:cNvSpPr>
-          <p:nvPr/>
-        </p:nvSpPr>
-        <p:spPr>
-          <a:xfrm>
-            <a:off x="90948" y="67362"/>
-            <a:ext cx="10515600" cy="1325563"/>
-          </a:xfrm>
-          <a:prstGeom prst="rect">
-            <a:avLst/>
-          </a:prstGeom>
-        </p:spPr>
-        <p:txBody>
-          <a:bodyPr vert="horz" lIns="91440" tIns="45720" rIns="91440" bIns="45720" rtlCol="0" anchor="ctr">
-            <a:normAutofit/>
-          </a:bodyPr>
-          <a:lstStyle>
-            <a:lvl1pPr algn="l" defTabSz="914400" rtl="0" eaLnBrk="1" latinLnBrk="0" hangingPunct="1">
-              <a:lnSpc>
-                <a:spcPct val="90000"/>
-              </a:lnSpc>
-              <a:spcBef>
-                <a:spcPct val="0"/>
-              </a:spcBef>
-              <a:buNone/>
-              <a:defRPr sz="4400" kern="1200">
-                <a:solidFill>
-                  <a:schemeClr val="tx1"/>
-                </a:solidFill>
-                <a:latin typeface="+mj-lt"/>
-                <a:ea typeface="+mj-ea"/>
-                <a:cs typeface="+mj-cs"/>
-              </a:defRPr>
-            </a:lvl1pPr>
-          </a:lstStyle>
-          <a:p>
-            <a:r>
-              <a:rPr lang="en-US"/>
-              <a:t>LVNV, WT sirtalis, T, and WT hammondii</a:t>
-            </a:r>
-            <a:endParaRPr lang="en-US" dirty="0"/>
-          </a:p>
-        </p:txBody>
-      </p:sp>
-    </p:spTree>
-    <p:extLst>
-      <p:ext uri="{BB962C8B-B14F-4D97-AF65-F5344CB8AC3E}">
-        <p14:creationId xmlns:p14="http://schemas.microsoft.com/office/powerpoint/2010/main" val="4275669859"/>
-      </p:ext>
-    </p:extLst>
-  </p:cSld>
-  <p:clrMapOvr>
-    <a:masterClrMapping/>
-  </p:clrMapOvr>
-</p:sld>
-</file>
-
-<file path=ppt/slides/slide17.xml><?xml version="1.0" encoding="utf-8"?>
-<p:sld xmlns:a="http://schemas.openxmlformats.org/drawingml/2006/main" xmlns:r="http://schemas.openxmlformats.org/officeDocument/2006/relationships" xmlns:p="http://schemas.openxmlformats.org/presentationml/2006/main">
-  <p:cSld>
-    <p:spTree>
-      <p:nvGrpSpPr>
-        <p:cNvPr id="1" name="">
-          <a:extLst>
-            <a:ext uri="{FF2B5EF4-FFF2-40B4-BE49-F238E27FC236}">
-              <a16:creationId xmlns:a16="http://schemas.microsoft.com/office/drawing/2014/main" id="{C1043B44-34D3-19EA-DD84-E70773487328}"/>
-            </a:ext>
-          </a:extLst>
-        </p:cNvPr>
-        <p:cNvGrpSpPr/>
-        <p:nvPr/>
-      </p:nvGrpSpPr>
-      <p:grpSpPr>
-        <a:xfrm>
-          <a:off x="0" y="0"/>
-          <a:ext cx="0" cy="0"/>
-          <a:chOff x="0" y="0"/>
-          <a:chExt cx="0" cy="0"/>
-        </a:xfrm>
-      </p:grpSpPr>
-      <p:pic>
-        <p:nvPicPr>
-          <p:cNvPr id="12" name="Picture 11">
-            <a:extLst>
-              <a:ext uri="{FF2B5EF4-FFF2-40B4-BE49-F238E27FC236}">
-                <a16:creationId xmlns:a16="http://schemas.microsoft.com/office/drawing/2014/main" id="{584685CD-EDF6-07EE-727F-E35EC68EA9F1}"/>
-              </a:ext>
-            </a:extLst>
-          </p:cNvPr>
-          <p:cNvPicPr>
-            <a:picLocks noChangeAspect="1"/>
-          </p:cNvPicPr>
-          <p:nvPr/>
-        </p:nvPicPr>
-        <p:blipFill>
-          <a:blip r:embed="rId3">
-            <a:extLst>
-              <a:ext uri="{28A0092B-C50C-407E-A947-70E740481C1C}">
-                <a14:useLocalDpi xmlns:a14="http://schemas.microsoft.com/office/drawing/2010/main" val="0"/>
-              </a:ext>
-            </a:extLst>
-          </a:blip>
-          <a:stretch>
-            <a:fillRect/>
-          </a:stretch>
-        </p:blipFill>
-        <p:spPr>
-          <a:xfrm>
-            <a:off x="2912236" y="1116036"/>
-            <a:ext cx="6598933" cy="5465075"/>
-          </a:xfrm>
-          <a:prstGeom prst="rect">
-            <a:avLst/>
-          </a:prstGeom>
-        </p:spPr>
-      </p:pic>
-      <p:sp>
-        <p:nvSpPr>
-          <p:cNvPr id="2" name="Title 3">
-            <a:extLst>
-              <a:ext uri="{FF2B5EF4-FFF2-40B4-BE49-F238E27FC236}">
-                <a16:creationId xmlns:a16="http://schemas.microsoft.com/office/drawing/2014/main" id="{A5044021-225C-787E-D993-31352B208DBF}"/>
-              </a:ext>
-            </a:extLst>
-          </p:cNvPr>
-          <p:cNvSpPr txBox="1">
-            <a:spLocks/>
-          </p:cNvSpPr>
-          <p:nvPr/>
-        </p:nvSpPr>
-        <p:spPr>
-          <a:xfrm>
-            <a:off x="90948" y="67362"/>
-            <a:ext cx="10515600" cy="1325563"/>
-          </a:xfrm>
-          <a:prstGeom prst="rect">
-            <a:avLst/>
-          </a:prstGeom>
-        </p:spPr>
-        <p:txBody>
-          <a:bodyPr vert="horz" lIns="91440" tIns="45720" rIns="91440" bIns="45720" rtlCol="0" anchor="ctr">
-            <a:normAutofit/>
-          </a:bodyPr>
-          <a:lstStyle>
-            <a:lvl1pPr algn="l" defTabSz="914400" rtl="0" eaLnBrk="1" latinLnBrk="0" hangingPunct="1">
-              <a:lnSpc>
-                <a:spcPct val="90000"/>
-              </a:lnSpc>
-              <a:spcBef>
-                <a:spcPct val="0"/>
-              </a:spcBef>
-              <a:buNone/>
-              <a:defRPr sz="4400" kern="1200">
-                <a:solidFill>
-                  <a:schemeClr val="tx1"/>
-                </a:solidFill>
-                <a:latin typeface="+mj-lt"/>
-                <a:ea typeface="+mj-ea"/>
-                <a:cs typeface="+mj-cs"/>
-              </a:defRPr>
-            </a:lvl1pPr>
-          </a:lstStyle>
-          <a:p>
-            <a:r>
-              <a:rPr lang="en-US"/>
-              <a:t>LVNV, WT sirtalis, T, and WT hammondii</a:t>
-            </a:r>
-            <a:endParaRPr lang="en-US" dirty="0"/>
-          </a:p>
-        </p:txBody>
-      </p:sp>
-    </p:spTree>
-    <p:extLst>
-      <p:ext uri="{BB962C8B-B14F-4D97-AF65-F5344CB8AC3E}">
-        <p14:creationId xmlns:p14="http://schemas.microsoft.com/office/powerpoint/2010/main" val="1172107471"/>
-      </p:ext>
-    </p:extLst>
-  </p:cSld>
-  <p:clrMapOvr>
-    <a:masterClrMapping/>
-  </p:clrMapOvr>
-</p:sld>
-</file>
-
-<file path=ppt/slides/slide18.xml><?xml version="1.0" encoding="utf-8"?>
-<p:sld xmlns:a="http://schemas.openxmlformats.org/drawingml/2006/main" xmlns:r="http://schemas.openxmlformats.org/officeDocument/2006/relationships" xmlns:p="http://schemas.openxmlformats.org/presentationml/2006/main">
-  <p:cSld>
-    <p:spTree>
-      <p:nvGrpSpPr>
-        <p:cNvPr id="1" name=""/>
-        <p:cNvGrpSpPr/>
-        <p:nvPr/>
-      </p:nvGrpSpPr>
-      <p:grpSpPr>
-        <a:xfrm>
-          <a:off x="0" y="0"/>
-          <a:ext cx="0" cy="0"/>
-          <a:chOff x="0" y="0"/>
-          <a:chExt cx="0" cy="0"/>
-        </a:xfrm>
-      </p:grpSpPr>
-      <p:sp>
-        <p:nvSpPr>
-          <p:cNvPr id="3" name="Title 2">
-            <a:extLst>
-              <a:ext uri="{FF2B5EF4-FFF2-40B4-BE49-F238E27FC236}">
-                <a16:creationId xmlns:a16="http://schemas.microsoft.com/office/drawing/2014/main" id="{2E352018-A25E-B43D-5D53-3A06345616FE}"/>
-              </a:ext>
-            </a:extLst>
-          </p:cNvPr>
-          <p:cNvSpPr>
-            <a:spLocks noGrp="1"/>
-          </p:cNvSpPr>
-          <p:nvPr>
-            <p:ph type="title"/>
-          </p:nvPr>
-        </p:nvSpPr>
-        <p:spPr/>
-        <p:txBody>
-          <a:bodyPr/>
-          <a:lstStyle/>
-          <a:p>
-            <a:r>
-              <a:rPr lang="en-US" dirty="0"/>
-              <a:t>Rheobase protocol</a:t>
-            </a:r>
-          </a:p>
-        </p:txBody>
-      </p:sp>
-      <p:sp>
-        <p:nvSpPr>
-          <p:cNvPr id="4" name="Text Placeholder 3">
-            <a:extLst>
-              <a:ext uri="{FF2B5EF4-FFF2-40B4-BE49-F238E27FC236}">
-                <a16:creationId xmlns:a16="http://schemas.microsoft.com/office/drawing/2014/main" id="{B9F7088C-394E-DDDE-A7B3-3A0D1F4BD1B2}"/>
-              </a:ext>
-            </a:extLst>
-          </p:cNvPr>
-          <p:cNvSpPr>
-            <a:spLocks noGrp="1"/>
-          </p:cNvSpPr>
-          <p:nvPr>
-            <p:ph type="body" idx="1"/>
-          </p:nvPr>
-        </p:nvSpPr>
-        <p:spPr/>
-        <p:txBody>
-          <a:bodyPr>
-            <a:normAutofit fontScale="92500"/>
-          </a:bodyPr>
-          <a:lstStyle/>
-          <a:p>
-            <a:r>
-              <a:rPr lang="en-US" dirty="0"/>
-              <a:t>I did not get here because I was over-ambitious and also had to redo all the previous plots multiple times because of a series of silly errors but I will also have this before our next meeting (hopefully by the end of the week if you’re curious and want to see them sooner, we can probably meet via zoom while I’m gone if you want)</a:t>
-            </a:r>
-          </a:p>
-        </p:txBody>
-      </p:sp>
-    </p:spTree>
-    <p:extLst>
-      <p:ext uri="{BB962C8B-B14F-4D97-AF65-F5344CB8AC3E}">
-        <p14:creationId xmlns:p14="http://schemas.microsoft.com/office/powerpoint/2010/main" val="2411144924"/>
-      </p:ext>
-    </p:extLst>
-  </p:cSld>
-  <p:clrMapOvr>
-    <a:masterClrMapping/>
-  </p:clrMapOvr>
-</p:sld>
-</file>
-
-<file path=ppt/slides/slide2.xml><?xml version="1.0" encoding="utf-8"?>
-<p:sld xmlns:a="http://schemas.openxmlformats.org/drawingml/2006/main" xmlns:r="http://schemas.openxmlformats.org/officeDocument/2006/relationships" xmlns:p="http://schemas.openxmlformats.org/presentationml/2006/main">
-  <p:cSld>
-    <p:spTree>
-      <p:nvGrpSpPr>
-        <p:cNvPr id="1" name=""/>
-        <p:cNvGrpSpPr/>
-        <p:nvPr/>
-      </p:nvGrpSpPr>
-      <p:grpSpPr>
-        <a:xfrm>
-          <a:off x="0" y="0"/>
-          <a:ext cx="0" cy="0"/>
-          <a:chOff x="0" y="0"/>
-          <a:chExt cx="0" cy="0"/>
-        </a:xfrm>
-      </p:grpSpPr>
-      <p:sp>
-        <p:nvSpPr>
-          <p:cNvPr id="4" name="Title 3">
-            <a:extLst>
-              <a:ext uri="{FF2B5EF4-FFF2-40B4-BE49-F238E27FC236}">
-                <a16:creationId xmlns:a16="http://schemas.microsoft.com/office/drawing/2014/main" id="{3BB4873F-15A7-243F-3F5E-1339E0076EF6}"/>
-              </a:ext>
-            </a:extLst>
-          </p:cNvPr>
-          <p:cNvSpPr>
-            <a:spLocks noGrp="1"/>
-          </p:cNvSpPr>
-          <p:nvPr>
-            <p:ph type="title"/>
-          </p:nvPr>
-        </p:nvSpPr>
-        <p:spPr/>
-        <p:txBody>
-          <a:bodyPr/>
-          <a:lstStyle/>
-          <a:p>
-            <a:r>
-              <a:rPr lang="en-US" dirty="0"/>
-              <a:t>Transient contractions (C4P)</a:t>
-            </a:r>
-          </a:p>
-        </p:txBody>
-      </p:sp>
-      <p:sp>
-        <p:nvSpPr>
-          <p:cNvPr id="5" name="Text Placeholder 4">
-            <a:extLst>
-              <a:ext uri="{FF2B5EF4-FFF2-40B4-BE49-F238E27FC236}">
-                <a16:creationId xmlns:a16="http://schemas.microsoft.com/office/drawing/2014/main" id="{3879C9DE-A46A-AA88-41BA-2B9B8190A14C}"/>
-              </a:ext>
-            </a:extLst>
-          </p:cNvPr>
-          <p:cNvSpPr>
-            <a:spLocks noGrp="1"/>
-          </p:cNvSpPr>
-          <p:nvPr>
-            <p:ph type="body" idx="1"/>
-          </p:nvPr>
-        </p:nvSpPr>
-        <p:spPr/>
-        <p:txBody>
-          <a:bodyPr/>
-          <a:lstStyle/>
-          <a:p>
-            <a:r>
-              <a:rPr lang="en-US" dirty="0"/>
-              <a:t>I apologize that the genotype colors are inconsistent across plots, I realized this as I was putting it together and I don’t have time to fix it tonight but I will get it fixed by whenever we next meet</a:t>
-            </a:r>
-          </a:p>
-        </p:txBody>
-      </p:sp>
-    </p:spTree>
-    <p:extLst>
-      <p:ext uri="{BB962C8B-B14F-4D97-AF65-F5344CB8AC3E}">
-        <p14:creationId xmlns:p14="http://schemas.microsoft.com/office/powerpoint/2010/main" val="2886554321"/>
-      </p:ext>
-    </p:extLst>
-  </p:cSld>
-  <p:clrMapOvr>
-    <a:masterClrMapping/>
-  </p:clrMapOvr>
-</p:sld>
-</file>
-
-<file path=ppt/slides/slide3.xml><?xml version="1.0" encoding="utf-8"?>
-<p:sld xmlns:a="http://schemas.openxmlformats.org/drawingml/2006/main" xmlns:r="http://schemas.openxmlformats.org/officeDocument/2006/relationships" xmlns:p="http://schemas.openxmlformats.org/presentationml/2006/main">
-  <p:cSld>
-    <p:spTree>
-      <p:nvGrpSpPr>
-        <p:cNvPr id="1" name=""/>
-        <p:cNvGrpSpPr/>
-        <p:nvPr/>
-      </p:nvGrpSpPr>
-      <p:grpSpPr>
-        <a:xfrm>
-          <a:off x="0" y="0"/>
-          <a:ext cx="0" cy="0"/>
-          <a:chOff x="0" y="0"/>
-          <a:chExt cx="0" cy="0"/>
-        </a:xfrm>
-      </p:grpSpPr>
-      <p:pic>
-        <p:nvPicPr>
-          <p:cNvPr id="5" name="Picture 4">
-            <a:extLst>
-              <a:ext uri="{FF2B5EF4-FFF2-40B4-BE49-F238E27FC236}">
-                <a16:creationId xmlns:a16="http://schemas.microsoft.com/office/drawing/2014/main" id="{802CC107-9FFD-BBFB-A181-68528F936C36}"/>
-              </a:ext>
-            </a:extLst>
-          </p:cNvPr>
-          <p:cNvPicPr>
-            <a:picLocks noChangeAspect="1"/>
-          </p:cNvPicPr>
-          <p:nvPr/>
-        </p:nvPicPr>
-        <p:blipFill>
-          <a:blip r:embed="rId3">
-            <a:extLst>
-              <a:ext uri="{28A0092B-C50C-407E-A947-70E740481C1C}">
-                <a14:useLocalDpi xmlns:a14="http://schemas.microsoft.com/office/drawing/2010/main" val="0"/>
-              </a:ext>
-            </a:extLst>
-          </a:blip>
-          <a:stretch>
-            <a:fillRect/>
-          </a:stretch>
-        </p:blipFill>
-        <p:spPr>
-          <a:xfrm>
-            <a:off x="2116021" y="132879"/>
-            <a:ext cx="7959957" cy="6592242"/>
-          </a:xfrm>
-          <a:prstGeom prst="rect">
-            <a:avLst/>
-          </a:prstGeom>
-        </p:spPr>
-      </p:pic>
-    </p:spTree>
-    <p:extLst>
-      <p:ext uri="{BB962C8B-B14F-4D97-AF65-F5344CB8AC3E}">
-        <p14:creationId xmlns:p14="http://schemas.microsoft.com/office/powerpoint/2010/main" val="4208517190"/>
-      </p:ext>
-    </p:extLst>
-  </p:cSld>
-  <p:clrMapOvr>
-    <a:masterClrMapping/>
-  </p:clrMapOvr>
-</p:sld>
-</file>
-
-<file path=ppt/slides/slide4.xml><?xml version="1.0" encoding="utf-8"?>
-<p:sld xmlns:a="http://schemas.openxmlformats.org/drawingml/2006/main" xmlns:r="http://schemas.openxmlformats.org/officeDocument/2006/relationships" xmlns:p="http://schemas.openxmlformats.org/presentationml/2006/main">
-  <p:cSld>
-    <p:spTree>
-      <p:nvGrpSpPr>
-        <p:cNvPr id="1" name=""/>
-        <p:cNvGrpSpPr/>
-        <p:nvPr/>
-      </p:nvGrpSpPr>
-      <p:grpSpPr>
-        <a:xfrm>
-          <a:off x="0" y="0"/>
-          <a:ext cx="0" cy="0"/>
-          <a:chOff x="0" y="0"/>
-          <a:chExt cx="0" cy="0"/>
-        </a:xfrm>
-      </p:grpSpPr>
-      <p:pic>
-        <p:nvPicPr>
-          <p:cNvPr id="31" name="Picture 30">
-            <a:extLst>
-              <a:ext uri="{FF2B5EF4-FFF2-40B4-BE49-F238E27FC236}">
-                <a16:creationId xmlns:a16="http://schemas.microsoft.com/office/drawing/2014/main" id="{4F500660-B97C-7AFD-62DA-A418B27FFFE5}"/>
-              </a:ext>
-            </a:extLst>
-          </p:cNvPr>
-          <p:cNvPicPr>
-            <a:picLocks noChangeAspect="1"/>
-          </p:cNvPicPr>
-          <p:nvPr/>
-        </p:nvPicPr>
-        <p:blipFill>
-          <a:blip r:embed="rId3">
-            <a:extLst>
-              <a:ext uri="{28A0092B-C50C-407E-A947-70E740481C1C}">
-                <a14:useLocalDpi xmlns:a14="http://schemas.microsoft.com/office/drawing/2010/main" val="0"/>
-              </a:ext>
-            </a:extLst>
-          </a:blip>
-          <a:stretch>
-            <a:fillRect/>
-          </a:stretch>
-        </p:blipFill>
-        <p:spPr>
-          <a:xfrm>
-            <a:off x="2483125" y="580104"/>
-            <a:ext cx="7658370" cy="6342475"/>
-          </a:xfrm>
-          <a:prstGeom prst="rect">
-            <a:avLst/>
-          </a:prstGeom>
-        </p:spPr>
-      </p:pic>
-      <p:sp>
-        <p:nvSpPr>
-          <p:cNvPr id="2" name="Title 1">
-            <a:extLst>
-              <a:ext uri="{FF2B5EF4-FFF2-40B4-BE49-F238E27FC236}">
-                <a16:creationId xmlns:a16="http://schemas.microsoft.com/office/drawing/2014/main" id="{8CFE8FC2-74F4-9BB5-D225-735858BA7BC7}"/>
-              </a:ext>
-            </a:extLst>
-          </p:cNvPr>
-          <p:cNvSpPr>
-            <a:spLocks noGrp="1"/>
-          </p:cNvSpPr>
-          <p:nvPr>
-            <p:ph type="title"/>
-          </p:nvPr>
-        </p:nvSpPr>
-        <p:spPr>
-          <a:xfrm>
-            <a:off x="149942" y="156572"/>
-            <a:ext cx="6162368" cy="423532"/>
-          </a:xfrm>
-        </p:spPr>
-        <p:txBody>
-          <a:bodyPr>
-            <a:normAutofit fontScale="90000"/>
-          </a:bodyPr>
-          <a:lstStyle/>
-          <a:p>
-            <a:r>
-              <a:rPr lang="en-US" dirty="0"/>
-              <a:t>LVNV, T, WT sirtalis</a:t>
-            </a:r>
-          </a:p>
-        </p:txBody>
-      </p:sp>
-    </p:spTree>
-    <p:extLst>
-      <p:ext uri="{BB962C8B-B14F-4D97-AF65-F5344CB8AC3E}">
-        <p14:creationId xmlns:p14="http://schemas.microsoft.com/office/powerpoint/2010/main" val="3596044053"/>
-      </p:ext>
-    </p:extLst>
-  </p:cSld>
-  <p:clrMapOvr>
-    <a:masterClrMapping/>
-  </p:clrMapOvr>
-</p:sld>
-</file>
-
-<file path=ppt/slides/slide5.xml><?xml version="1.0" encoding="utf-8"?>
-<p:sld xmlns:a="http://schemas.openxmlformats.org/drawingml/2006/main" xmlns:r="http://schemas.openxmlformats.org/officeDocument/2006/relationships" xmlns:p="http://schemas.openxmlformats.org/presentationml/2006/main">
-  <p:cSld>
-    <p:spTree>
-      <p:nvGrpSpPr>
-        <p:cNvPr id="1" name=""/>
-        <p:cNvGrpSpPr/>
-        <p:nvPr/>
-      </p:nvGrpSpPr>
-      <p:grpSpPr>
-        <a:xfrm>
-          <a:off x="0" y="0"/>
-          <a:ext cx="0" cy="0"/>
-          <a:chOff x="0" y="0"/>
-          <a:chExt cx="0" cy="0"/>
-        </a:xfrm>
-      </p:grpSpPr>
-      <p:pic>
-        <p:nvPicPr>
-          <p:cNvPr id="29" name="Picture 28">
-            <a:extLst>
-              <a:ext uri="{FF2B5EF4-FFF2-40B4-BE49-F238E27FC236}">
-                <a16:creationId xmlns:a16="http://schemas.microsoft.com/office/drawing/2014/main" id="{2DBBFDC0-9179-B2DE-3509-8AABFAFBB859}"/>
-              </a:ext>
-            </a:extLst>
-          </p:cNvPr>
-          <p:cNvPicPr>
-            <a:picLocks noChangeAspect="1"/>
-          </p:cNvPicPr>
-          <p:nvPr/>
-        </p:nvPicPr>
-        <p:blipFill>
-          <a:blip r:embed="rId3">
-            <a:extLst>
-              <a:ext uri="{28A0092B-C50C-407E-A947-70E740481C1C}">
-                <a14:useLocalDpi xmlns:a14="http://schemas.microsoft.com/office/drawing/2010/main" val="0"/>
-              </a:ext>
-            </a:extLst>
-          </a:blip>
-          <a:stretch>
-            <a:fillRect/>
-          </a:stretch>
-        </p:blipFill>
-        <p:spPr>
-          <a:xfrm>
-            <a:off x="2470331" y="743132"/>
-            <a:ext cx="7251338" cy="6005381"/>
-          </a:xfrm>
-          <a:prstGeom prst="rect">
-            <a:avLst/>
-          </a:prstGeom>
-        </p:spPr>
-      </p:pic>
-      <p:sp>
-        <p:nvSpPr>
-          <p:cNvPr id="3" name="Title 2">
-            <a:extLst>
-              <a:ext uri="{FF2B5EF4-FFF2-40B4-BE49-F238E27FC236}">
-                <a16:creationId xmlns:a16="http://schemas.microsoft.com/office/drawing/2014/main" id="{1B066AFE-3330-875C-2992-77ECA537184C}"/>
-              </a:ext>
-            </a:extLst>
-          </p:cNvPr>
-          <p:cNvSpPr>
-            <a:spLocks noGrp="1"/>
-          </p:cNvSpPr>
-          <p:nvPr>
-            <p:ph type="title"/>
-          </p:nvPr>
-        </p:nvSpPr>
-        <p:spPr>
-          <a:xfrm>
-            <a:off x="130277" y="109487"/>
-            <a:ext cx="9869129" cy="667262"/>
-          </a:xfrm>
-        </p:spPr>
-        <p:txBody>
-          <a:bodyPr>
-            <a:normAutofit fontScale="90000"/>
-          </a:bodyPr>
-          <a:lstStyle/>
-          <a:p>
-            <a:r>
-              <a:rPr lang="en-US" dirty="0"/>
-              <a:t>EPN, LVNV, T, WT sirtalis</a:t>
-            </a:r>
-          </a:p>
-        </p:txBody>
-      </p:sp>
-    </p:spTree>
-    <p:extLst>
-      <p:ext uri="{BB962C8B-B14F-4D97-AF65-F5344CB8AC3E}">
-        <p14:creationId xmlns:p14="http://schemas.microsoft.com/office/powerpoint/2010/main" val="959217749"/>
-      </p:ext>
-    </p:extLst>
-  </p:cSld>
-  <p:clrMapOvr>
-    <a:masterClrMapping/>
-  </p:clrMapOvr>
-</p:sld>
-</file>
-
-<file path=ppt/slides/slide6.xml><?xml version="1.0" encoding="utf-8"?>
-<p:sld xmlns:a="http://schemas.openxmlformats.org/drawingml/2006/main" xmlns:r="http://schemas.openxmlformats.org/officeDocument/2006/relationships" xmlns:p="http://schemas.openxmlformats.org/presentationml/2006/main">
-  <p:cSld>
-    <p:spTree>
-      <p:nvGrpSpPr>
-        <p:cNvPr id="1" name=""/>
-        <p:cNvGrpSpPr/>
-        <p:nvPr/>
-      </p:nvGrpSpPr>
-      <p:grpSpPr>
-        <a:xfrm>
-          <a:off x="0" y="0"/>
-          <a:ext cx="0" cy="0"/>
-          <a:chOff x="0" y="0"/>
-          <a:chExt cx="0" cy="0"/>
-        </a:xfrm>
-      </p:grpSpPr>
-      <p:pic>
-        <p:nvPicPr>
-          <p:cNvPr id="21" name="Picture 20">
-            <a:extLst>
-              <a:ext uri="{FF2B5EF4-FFF2-40B4-BE49-F238E27FC236}">
-                <a16:creationId xmlns:a16="http://schemas.microsoft.com/office/drawing/2014/main" id="{ABBD96AC-A510-4B21-1CAD-CD4AA3181743}"/>
-              </a:ext>
-            </a:extLst>
-          </p:cNvPr>
-          <p:cNvPicPr>
-            <a:picLocks noChangeAspect="1"/>
-          </p:cNvPicPr>
-          <p:nvPr/>
-        </p:nvPicPr>
-        <p:blipFill>
-          <a:blip r:embed="rId3">
-            <a:extLst>
-              <a:ext uri="{28A0092B-C50C-407E-A947-70E740481C1C}">
-                <a14:useLocalDpi xmlns:a14="http://schemas.microsoft.com/office/drawing/2010/main" val="0"/>
-              </a:ext>
-            </a:extLst>
-          </a:blip>
-          <a:stretch>
-            <a:fillRect/>
-          </a:stretch>
-        </p:blipFill>
-        <p:spPr>
-          <a:xfrm>
-            <a:off x="2273570" y="597654"/>
-            <a:ext cx="7644860" cy="6331286"/>
-          </a:xfrm>
-          <a:prstGeom prst="rect">
-            <a:avLst/>
-          </a:prstGeom>
-        </p:spPr>
-      </p:pic>
-      <p:sp>
-        <p:nvSpPr>
-          <p:cNvPr id="2" name="Title 1">
-            <a:extLst>
-              <a:ext uri="{FF2B5EF4-FFF2-40B4-BE49-F238E27FC236}">
-                <a16:creationId xmlns:a16="http://schemas.microsoft.com/office/drawing/2014/main" id="{9E1B3FD0-DCB1-7C76-EB70-5B896BA4D7A4}"/>
-              </a:ext>
-            </a:extLst>
-          </p:cNvPr>
-          <p:cNvSpPr>
-            <a:spLocks noGrp="1"/>
-          </p:cNvSpPr>
-          <p:nvPr>
-            <p:ph type="title"/>
-          </p:nvPr>
-        </p:nvSpPr>
-        <p:spPr>
-          <a:xfrm>
-            <a:off x="159774" y="263357"/>
-            <a:ext cx="9080230" cy="175649"/>
-          </a:xfrm>
-        </p:spPr>
-        <p:txBody>
-          <a:bodyPr>
-            <a:normAutofit fontScale="90000"/>
-          </a:bodyPr>
-          <a:lstStyle/>
-          <a:p>
-            <a:r>
-              <a:rPr lang="en-US" dirty="0"/>
-              <a:t>T, LVNV, WT sirtalis, </a:t>
-            </a:r>
-            <a:r>
-              <a:rPr lang="en-US" dirty="0" err="1"/>
-              <a:t>hammondii</a:t>
-            </a:r>
-            <a:endParaRPr lang="en-US" dirty="0"/>
-          </a:p>
-        </p:txBody>
-      </p:sp>
-    </p:spTree>
-    <p:extLst>
-      <p:ext uri="{BB962C8B-B14F-4D97-AF65-F5344CB8AC3E}">
-        <p14:creationId xmlns:p14="http://schemas.microsoft.com/office/powerpoint/2010/main" val="3843965665"/>
-      </p:ext>
-    </p:extLst>
-  </p:cSld>
-  <p:clrMapOvr>
-    <a:masterClrMapping/>
-  </p:clrMapOvr>
-</p:sld>
-</file>
-
-<file path=ppt/slides/slide7.xml><?xml version="1.0" encoding="utf-8"?>
-<p:sld xmlns:a="http://schemas.openxmlformats.org/drawingml/2006/main" xmlns:r="http://schemas.openxmlformats.org/officeDocument/2006/relationships" xmlns:p="http://schemas.openxmlformats.org/presentationml/2006/main">
-  <p:cSld>
-    <p:spTree>
-      <p:nvGrpSpPr>
-        <p:cNvPr id="1" name=""/>
-        <p:cNvGrpSpPr/>
-        <p:nvPr/>
-      </p:nvGrpSpPr>
-      <p:grpSpPr>
-        <a:xfrm>
-          <a:off x="0" y="0"/>
-          <a:ext cx="0" cy="0"/>
-          <a:chOff x="0" y="0"/>
-          <a:chExt cx="0" cy="0"/>
-        </a:xfrm>
-      </p:grpSpPr>
-      <p:pic>
-        <p:nvPicPr>
-          <p:cNvPr id="23" name="Picture 22">
-            <a:extLst>
-              <a:ext uri="{FF2B5EF4-FFF2-40B4-BE49-F238E27FC236}">
-                <a16:creationId xmlns:a16="http://schemas.microsoft.com/office/drawing/2014/main" id="{20FF2F85-7B1C-51EB-2A21-E2C82DD1DB61}"/>
-              </a:ext>
-            </a:extLst>
-          </p:cNvPr>
-          <p:cNvPicPr>
-            <a:picLocks noChangeAspect="1"/>
-          </p:cNvPicPr>
-          <p:nvPr/>
-        </p:nvPicPr>
-        <p:blipFill>
-          <a:blip r:embed="rId3">
-            <a:extLst>
-              <a:ext uri="{28A0092B-C50C-407E-A947-70E740481C1C}">
-                <a14:useLocalDpi xmlns:a14="http://schemas.microsoft.com/office/drawing/2010/main" val="0"/>
-              </a:ext>
-            </a:extLst>
-          </a:blip>
-          <a:stretch>
-            <a:fillRect/>
-          </a:stretch>
-        </p:blipFill>
-        <p:spPr>
-          <a:xfrm>
-            <a:off x="2191850" y="529312"/>
-            <a:ext cx="7808299" cy="6466642"/>
-          </a:xfrm>
-          <a:prstGeom prst="rect">
-            <a:avLst/>
-          </a:prstGeom>
-        </p:spPr>
-      </p:pic>
-      <p:pic>
-        <p:nvPicPr>
-          <p:cNvPr id="4" name="Picture 3">
-            <a:extLst>
-              <a:ext uri="{FF2B5EF4-FFF2-40B4-BE49-F238E27FC236}">
-                <a16:creationId xmlns:a16="http://schemas.microsoft.com/office/drawing/2014/main" id="{B11CAAF9-DF87-20B5-B87E-C1F8AE1B399C}"/>
-              </a:ext>
-            </a:extLst>
-          </p:cNvPr>
-          <p:cNvPicPr>
-            <a:picLocks noChangeAspect="1"/>
-          </p:cNvPicPr>
-          <p:nvPr/>
-        </p:nvPicPr>
-        <p:blipFill>
-          <a:blip r:embed="rId4"/>
-          <a:stretch>
-            <a:fillRect/>
-          </a:stretch>
-        </p:blipFill>
-        <p:spPr>
-          <a:xfrm>
-            <a:off x="-165093" y="-86075"/>
-            <a:ext cx="9297206" cy="1072989"/>
-          </a:xfrm>
-          <a:prstGeom prst="rect">
-            <a:avLst/>
-          </a:prstGeom>
-        </p:spPr>
-      </p:pic>
-    </p:spTree>
-    <p:extLst>
-      <p:ext uri="{BB962C8B-B14F-4D97-AF65-F5344CB8AC3E}">
-        <p14:creationId xmlns:p14="http://schemas.microsoft.com/office/powerpoint/2010/main" val="692453888"/>
-      </p:ext>
-    </p:extLst>
-  </p:cSld>
-  <p:clrMapOvr>
-    <a:masterClrMapping/>
-  </p:clrMapOvr>
-</p:sld>
-</file>
-
-<file path=ppt/slides/slide8.xml><?xml version="1.0" encoding="utf-8"?>
-<p:sld xmlns:a="http://schemas.openxmlformats.org/drawingml/2006/main" xmlns:r="http://schemas.openxmlformats.org/officeDocument/2006/relationships" xmlns:p="http://schemas.openxmlformats.org/presentationml/2006/main">
-  <p:cSld>
-    <p:spTree>
-      <p:nvGrpSpPr>
         <p:cNvPr id="1" name="">
           <a:extLst>
             <a:ext uri="{FF2B5EF4-FFF2-40B4-BE49-F238E27FC236}">
@@ -6639,7 +5151,7 @@
 </p:sld>
 </file>
 
-<file path=ppt/slides/slide9.xml><?xml version="1.0" encoding="utf-8"?>
+<file path=ppt/slides/slide11.xml><?xml version="1.0" encoding="utf-8"?>
 <p:sld xmlns:a="http://schemas.openxmlformats.org/drawingml/2006/main" xmlns:r="http://schemas.openxmlformats.org/officeDocument/2006/relationships" xmlns:p="http://schemas.openxmlformats.org/presentationml/2006/main">
   <p:cSld>
     <p:spTree>
@@ -6732,6 +5244,1998 @@
     <p:extLst>
       <p:ext uri="{BB962C8B-B14F-4D97-AF65-F5344CB8AC3E}">
         <p14:creationId xmlns:p14="http://schemas.microsoft.com/office/powerpoint/2010/main" val="1751170841"/>
+      </p:ext>
+    </p:extLst>
+  </p:cSld>
+  <p:clrMapOvr>
+    <a:masterClrMapping/>
+  </p:clrMapOvr>
+</p:sld>
+</file>
+
+<file path=ppt/slides/slide12.xml><?xml version="1.0" encoding="utf-8"?>
+<p:sld xmlns:a="http://schemas.openxmlformats.org/drawingml/2006/main" xmlns:r="http://schemas.openxmlformats.org/officeDocument/2006/relationships" xmlns:p="http://schemas.openxmlformats.org/presentationml/2006/main">
+  <p:cSld>
+    <p:spTree>
+      <p:nvGrpSpPr>
+        <p:cNvPr id="1" name=""/>
+        <p:cNvGrpSpPr/>
+        <p:nvPr/>
+      </p:nvGrpSpPr>
+      <p:grpSpPr>
+        <a:xfrm>
+          <a:off x="0" y="0"/>
+          <a:ext cx="0" cy="0"/>
+          <a:chOff x="0" y="0"/>
+          <a:chExt cx="0" cy="0"/>
+        </a:xfrm>
+      </p:grpSpPr>
+      <p:sp>
+        <p:nvSpPr>
+          <p:cNvPr id="2" name="Title 1">
+            <a:extLst>
+              <a:ext uri="{FF2B5EF4-FFF2-40B4-BE49-F238E27FC236}">
+                <a16:creationId xmlns:a16="http://schemas.microsoft.com/office/drawing/2014/main" id="{F22E7229-A7F7-248B-E6F8-BE83DB34ADB7}"/>
+              </a:ext>
+            </a:extLst>
+          </p:cNvPr>
+          <p:cNvSpPr>
+            <a:spLocks noGrp="1"/>
+          </p:cNvSpPr>
+          <p:nvPr>
+            <p:ph type="title"/>
+          </p:nvPr>
+        </p:nvSpPr>
+        <p:spPr/>
+        <p:txBody>
+          <a:bodyPr/>
+          <a:lstStyle/>
+          <a:p>
+            <a:r>
+              <a:rPr lang="en-US" dirty="0"/>
+              <a:t>Tetanic contractions (tetanus)</a:t>
+            </a:r>
+          </a:p>
+        </p:txBody>
+      </p:sp>
+      <p:sp>
+        <p:nvSpPr>
+          <p:cNvPr id="3" name="Text Placeholder 2">
+            <a:extLst>
+              <a:ext uri="{FF2B5EF4-FFF2-40B4-BE49-F238E27FC236}">
+                <a16:creationId xmlns:a16="http://schemas.microsoft.com/office/drawing/2014/main" id="{3A446006-E94C-5109-981F-0EE1E9215759}"/>
+              </a:ext>
+            </a:extLst>
+          </p:cNvPr>
+          <p:cNvSpPr>
+            <a:spLocks noGrp="1"/>
+          </p:cNvSpPr>
+          <p:nvPr>
+            <p:ph type="body" idx="1"/>
+          </p:nvPr>
+        </p:nvSpPr>
+        <p:spPr/>
+        <p:txBody>
+          <a:bodyPr/>
+          <a:lstStyle/>
+          <a:p>
+            <a:r>
+              <a:rPr lang="en-US" dirty="0"/>
+              <a:t>Same note about the colors, apologies that they’re all wonky again</a:t>
+            </a:r>
+          </a:p>
+        </p:txBody>
+      </p:sp>
+    </p:spTree>
+    <p:extLst>
+      <p:ext uri="{BB962C8B-B14F-4D97-AF65-F5344CB8AC3E}">
+        <p14:creationId xmlns:p14="http://schemas.microsoft.com/office/powerpoint/2010/main" val="1388248658"/>
+      </p:ext>
+    </p:extLst>
+  </p:cSld>
+  <p:clrMapOvr>
+    <a:masterClrMapping/>
+  </p:clrMapOvr>
+</p:sld>
+</file>
+
+<file path=ppt/slides/slide13.xml><?xml version="1.0" encoding="utf-8"?>
+<p:sld xmlns:a="http://schemas.openxmlformats.org/drawingml/2006/main" xmlns:r="http://schemas.openxmlformats.org/officeDocument/2006/relationships" xmlns:p="http://schemas.openxmlformats.org/presentationml/2006/main">
+  <p:cSld>
+    <p:spTree>
+      <p:nvGrpSpPr>
+        <p:cNvPr id="1" name=""/>
+        <p:cNvGrpSpPr/>
+        <p:nvPr/>
+      </p:nvGrpSpPr>
+      <p:grpSpPr>
+        <a:xfrm>
+          <a:off x="0" y="0"/>
+          <a:ext cx="0" cy="0"/>
+          <a:chOff x="0" y="0"/>
+          <a:chExt cx="0" cy="0"/>
+        </a:xfrm>
+      </p:grpSpPr>
+      <p:sp>
+        <p:nvSpPr>
+          <p:cNvPr id="4" name="Title 3">
+            <a:extLst>
+              <a:ext uri="{FF2B5EF4-FFF2-40B4-BE49-F238E27FC236}">
+                <a16:creationId xmlns:a16="http://schemas.microsoft.com/office/drawing/2014/main" id="{C621FD58-D8DF-4216-E79C-69D541F9DF72}"/>
+              </a:ext>
+            </a:extLst>
+          </p:cNvPr>
+          <p:cNvSpPr>
+            <a:spLocks noGrp="1"/>
+          </p:cNvSpPr>
+          <p:nvPr>
+            <p:ph type="title"/>
+          </p:nvPr>
+        </p:nvSpPr>
+        <p:spPr>
+          <a:xfrm>
+            <a:off x="237066" y="-146756"/>
+            <a:ext cx="10515600" cy="1325563"/>
+          </a:xfrm>
+        </p:spPr>
+        <p:txBody>
+          <a:bodyPr/>
+          <a:lstStyle/>
+          <a:p>
+            <a:r>
+              <a:rPr lang="en-US" dirty="0"/>
+              <a:t>All</a:t>
+            </a:r>
+          </a:p>
+        </p:txBody>
+      </p:sp>
+      <p:pic>
+        <p:nvPicPr>
+          <p:cNvPr id="6" name="Picture 5">
+            <a:extLst>
+              <a:ext uri="{FF2B5EF4-FFF2-40B4-BE49-F238E27FC236}">
+                <a16:creationId xmlns:a16="http://schemas.microsoft.com/office/drawing/2014/main" id="{9CDB7DB8-A0FB-BC8E-495F-4BDABE32916F}"/>
+              </a:ext>
+            </a:extLst>
+          </p:cNvPr>
+          <p:cNvPicPr>
+            <a:picLocks noChangeAspect="1"/>
+          </p:cNvPicPr>
+          <p:nvPr/>
+        </p:nvPicPr>
+        <p:blipFill>
+          <a:blip r:embed="rId2">
+            <a:extLst>
+              <a:ext uri="{28A0092B-C50C-407E-A947-70E740481C1C}">
+                <a14:useLocalDpi xmlns:a14="http://schemas.microsoft.com/office/drawing/2010/main" val="0"/>
+              </a:ext>
+            </a:extLst>
+          </a:blip>
+          <a:stretch>
+            <a:fillRect/>
+          </a:stretch>
+        </p:blipFill>
+        <p:spPr>
+          <a:xfrm>
+            <a:off x="2310830" y="777857"/>
+            <a:ext cx="8616814" cy="5913132"/>
+          </a:xfrm>
+          <a:prstGeom prst="rect">
+            <a:avLst/>
+          </a:prstGeom>
+        </p:spPr>
+      </p:pic>
+    </p:spTree>
+    <p:extLst>
+      <p:ext uri="{BB962C8B-B14F-4D97-AF65-F5344CB8AC3E}">
+        <p14:creationId xmlns:p14="http://schemas.microsoft.com/office/powerpoint/2010/main" val="3292886314"/>
+      </p:ext>
+    </p:extLst>
+  </p:cSld>
+  <p:clrMapOvr>
+    <a:masterClrMapping/>
+  </p:clrMapOvr>
+</p:sld>
+</file>
+
+<file path=ppt/slides/slide14.xml><?xml version="1.0" encoding="utf-8"?>
+<p:sld xmlns:a="http://schemas.openxmlformats.org/drawingml/2006/main" xmlns:r="http://schemas.openxmlformats.org/officeDocument/2006/relationships" xmlns:p="http://schemas.openxmlformats.org/presentationml/2006/main">
+  <p:cSld>
+    <p:spTree>
+      <p:nvGrpSpPr>
+        <p:cNvPr id="1" name=""/>
+        <p:cNvGrpSpPr/>
+        <p:nvPr/>
+      </p:nvGrpSpPr>
+      <p:grpSpPr>
+        <a:xfrm>
+          <a:off x="0" y="0"/>
+          <a:ext cx="0" cy="0"/>
+          <a:chOff x="0" y="0"/>
+          <a:chExt cx="0" cy="0"/>
+        </a:xfrm>
+      </p:grpSpPr>
+      <p:pic>
+        <p:nvPicPr>
+          <p:cNvPr id="18" name="Picture 17">
+            <a:extLst>
+              <a:ext uri="{FF2B5EF4-FFF2-40B4-BE49-F238E27FC236}">
+                <a16:creationId xmlns:a16="http://schemas.microsoft.com/office/drawing/2014/main" id="{3D69B59F-D994-2285-6033-2FB458B34C42}"/>
+              </a:ext>
+            </a:extLst>
+          </p:cNvPr>
+          <p:cNvPicPr>
+            <a:picLocks noChangeAspect="1"/>
+          </p:cNvPicPr>
+          <p:nvPr/>
+        </p:nvPicPr>
+        <p:blipFill>
+          <a:blip r:embed="rId3">
+            <a:extLst>
+              <a:ext uri="{28A0092B-C50C-407E-A947-70E740481C1C}">
+                <a14:useLocalDpi xmlns:a14="http://schemas.microsoft.com/office/drawing/2010/main" val="0"/>
+              </a:ext>
+            </a:extLst>
+          </a:blip>
+          <a:stretch>
+            <a:fillRect/>
+          </a:stretch>
+        </p:blipFill>
+        <p:spPr>
+          <a:xfrm>
+            <a:off x="1746667" y="239641"/>
+            <a:ext cx="7702133" cy="6378718"/>
+          </a:xfrm>
+          <a:prstGeom prst="rect">
+            <a:avLst/>
+          </a:prstGeom>
+        </p:spPr>
+      </p:pic>
+      <p:sp>
+        <p:nvSpPr>
+          <p:cNvPr id="2" name="Title 3">
+            <a:extLst>
+              <a:ext uri="{FF2B5EF4-FFF2-40B4-BE49-F238E27FC236}">
+                <a16:creationId xmlns:a16="http://schemas.microsoft.com/office/drawing/2014/main" id="{92950DC0-0DE4-70B1-E1B2-7FB9773D61AE}"/>
+              </a:ext>
+            </a:extLst>
+          </p:cNvPr>
+          <p:cNvSpPr txBox="1">
+            <a:spLocks/>
+          </p:cNvSpPr>
+          <p:nvPr/>
+        </p:nvSpPr>
+        <p:spPr>
+          <a:xfrm>
+            <a:off x="5354407" y="114227"/>
+            <a:ext cx="7359704" cy="629121"/>
+          </a:xfrm>
+          <a:prstGeom prst="rect">
+            <a:avLst/>
+          </a:prstGeom>
+        </p:spPr>
+        <p:txBody>
+          <a:bodyPr/>
+          <a:lstStyle>
+            <a:lvl1pPr algn="l" defTabSz="914400" rtl="0" eaLnBrk="1" latinLnBrk="0" hangingPunct="1">
+              <a:lnSpc>
+                <a:spcPct val="90000"/>
+              </a:lnSpc>
+              <a:spcBef>
+                <a:spcPct val="0"/>
+              </a:spcBef>
+              <a:buNone/>
+              <a:defRPr sz="4400" kern="1200">
+                <a:solidFill>
+                  <a:schemeClr val="tx1"/>
+                </a:solidFill>
+                <a:latin typeface="+mj-lt"/>
+                <a:ea typeface="+mj-ea"/>
+                <a:cs typeface="+mj-cs"/>
+              </a:defRPr>
+            </a:lvl1pPr>
+          </a:lstStyle>
+          <a:p>
+            <a:r>
+              <a:rPr lang="en-US" dirty="0"/>
+              <a:t>Prev minus WT elegans and P</a:t>
+            </a:r>
+          </a:p>
+        </p:txBody>
+      </p:sp>
+    </p:spTree>
+    <p:extLst>
+      <p:ext uri="{BB962C8B-B14F-4D97-AF65-F5344CB8AC3E}">
+        <p14:creationId xmlns:p14="http://schemas.microsoft.com/office/powerpoint/2010/main" val="1887341186"/>
+      </p:ext>
+    </p:extLst>
+  </p:cSld>
+  <p:clrMapOvr>
+    <a:masterClrMapping/>
+  </p:clrMapOvr>
+</p:sld>
+</file>
+
+<file path=ppt/slides/slide15.xml><?xml version="1.0" encoding="utf-8"?>
+<p:sld xmlns:a="http://schemas.openxmlformats.org/drawingml/2006/main" xmlns:r="http://schemas.openxmlformats.org/officeDocument/2006/relationships" xmlns:p="http://schemas.openxmlformats.org/presentationml/2006/main">
+  <p:cSld>
+    <p:spTree>
+      <p:nvGrpSpPr>
+        <p:cNvPr id="1" name=""/>
+        <p:cNvGrpSpPr/>
+        <p:nvPr/>
+      </p:nvGrpSpPr>
+      <p:grpSpPr>
+        <a:xfrm>
+          <a:off x="0" y="0"/>
+          <a:ext cx="0" cy="0"/>
+          <a:chOff x="0" y="0"/>
+          <a:chExt cx="0" cy="0"/>
+        </a:xfrm>
+      </p:grpSpPr>
+      <p:sp>
+        <p:nvSpPr>
+          <p:cNvPr id="2" name="Title 1">
+            <a:extLst>
+              <a:ext uri="{FF2B5EF4-FFF2-40B4-BE49-F238E27FC236}">
+                <a16:creationId xmlns:a16="http://schemas.microsoft.com/office/drawing/2014/main" id="{D1566D96-5685-587C-BDD7-D2D849A6994D}"/>
+              </a:ext>
+            </a:extLst>
+          </p:cNvPr>
+          <p:cNvSpPr>
+            <a:spLocks noGrp="1"/>
+          </p:cNvSpPr>
+          <p:nvPr>
+            <p:ph type="title"/>
+          </p:nvPr>
+        </p:nvSpPr>
+        <p:spPr>
+          <a:xfrm>
+            <a:off x="149578" y="0"/>
+            <a:ext cx="10515600" cy="1325563"/>
+          </a:xfrm>
+        </p:spPr>
+        <p:txBody>
+          <a:bodyPr/>
+          <a:lstStyle/>
+          <a:p>
+            <a:r>
+              <a:rPr lang="en-US" dirty="0"/>
+              <a:t>All WT</a:t>
+            </a:r>
+          </a:p>
+        </p:txBody>
+      </p:sp>
+      <p:pic>
+        <p:nvPicPr>
+          <p:cNvPr id="4" name="Picture 3">
+            <a:extLst>
+              <a:ext uri="{FF2B5EF4-FFF2-40B4-BE49-F238E27FC236}">
+                <a16:creationId xmlns:a16="http://schemas.microsoft.com/office/drawing/2014/main" id="{76BB063A-F5E4-D460-81A5-D1FDDF041500}"/>
+              </a:ext>
+            </a:extLst>
+          </p:cNvPr>
+          <p:cNvPicPr>
+            <a:picLocks noChangeAspect="1"/>
+          </p:cNvPicPr>
+          <p:nvPr/>
+        </p:nvPicPr>
+        <p:blipFill>
+          <a:blip r:embed="rId2">
+            <a:extLst>
+              <a:ext uri="{28A0092B-C50C-407E-A947-70E740481C1C}">
+                <a14:useLocalDpi xmlns:a14="http://schemas.microsoft.com/office/drawing/2010/main" val="0"/>
+              </a:ext>
+            </a:extLst>
+          </a:blip>
+          <a:stretch>
+            <a:fillRect/>
+          </a:stretch>
+        </p:blipFill>
+        <p:spPr>
+          <a:xfrm>
+            <a:off x="2062475" y="292435"/>
+            <a:ext cx="9497347" cy="6517382"/>
+          </a:xfrm>
+          <a:prstGeom prst="rect">
+            <a:avLst/>
+          </a:prstGeom>
+        </p:spPr>
+      </p:pic>
+    </p:spTree>
+    <p:extLst>
+      <p:ext uri="{BB962C8B-B14F-4D97-AF65-F5344CB8AC3E}">
+        <p14:creationId xmlns:p14="http://schemas.microsoft.com/office/powerpoint/2010/main" val="653773994"/>
+      </p:ext>
+    </p:extLst>
+  </p:cSld>
+  <p:clrMapOvr>
+    <a:masterClrMapping/>
+  </p:clrMapOvr>
+</p:sld>
+</file>
+
+<file path=ppt/slides/slide16.xml><?xml version="1.0" encoding="utf-8"?>
+<p:sld xmlns:a="http://schemas.openxmlformats.org/drawingml/2006/main" xmlns:r="http://schemas.openxmlformats.org/officeDocument/2006/relationships" xmlns:p="http://schemas.openxmlformats.org/presentationml/2006/main">
+  <p:cSld>
+    <p:spTree>
+      <p:nvGrpSpPr>
+        <p:cNvPr id="1" name="">
+          <a:extLst>
+            <a:ext uri="{FF2B5EF4-FFF2-40B4-BE49-F238E27FC236}">
+              <a16:creationId xmlns:a16="http://schemas.microsoft.com/office/drawing/2014/main" id="{E0D1D141-BF55-6CFA-D0D4-E2DF47FE6C02}"/>
+            </a:ext>
+          </a:extLst>
+        </p:cNvPr>
+        <p:cNvGrpSpPr/>
+        <p:nvPr/>
+      </p:nvGrpSpPr>
+      <p:grpSpPr>
+        <a:xfrm>
+          <a:off x="0" y="0"/>
+          <a:ext cx="0" cy="0"/>
+          <a:chOff x="0" y="0"/>
+          <a:chExt cx="0" cy="0"/>
+        </a:xfrm>
+      </p:grpSpPr>
+      <p:sp>
+        <p:nvSpPr>
+          <p:cNvPr id="4" name="Title 3">
+            <a:extLst>
+              <a:ext uri="{FF2B5EF4-FFF2-40B4-BE49-F238E27FC236}">
+                <a16:creationId xmlns:a16="http://schemas.microsoft.com/office/drawing/2014/main" id="{F742240D-C979-78B2-8631-D9A15E3CC603}"/>
+              </a:ext>
+            </a:extLst>
+          </p:cNvPr>
+          <p:cNvSpPr>
+            <a:spLocks noGrp="1"/>
+          </p:cNvSpPr>
+          <p:nvPr>
+            <p:ph type="title"/>
+          </p:nvPr>
+        </p:nvSpPr>
+        <p:spPr>
+          <a:xfrm>
+            <a:off x="159774" y="70158"/>
+            <a:ext cx="10515600" cy="1325563"/>
+          </a:xfrm>
+        </p:spPr>
+        <p:txBody>
+          <a:bodyPr/>
+          <a:lstStyle/>
+          <a:p>
+            <a:r>
+              <a:rPr lang="en-US" dirty="0"/>
+              <a:t>LVNV, T, and WT sirtalis</a:t>
+            </a:r>
+          </a:p>
+        </p:txBody>
+      </p:sp>
+      <p:pic>
+        <p:nvPicPr>
+          <p:cNvPr id="16" name="Picture 15">
+            <a:extLst>
+              <a:ext uri="{FF2B5EF4-FFF2-40B4-BE49-F238E27FC236}">
+                <a16:creationId xmlns:a16="http://schemas.microsoft.com/office/drawing/2014/main" id="{0FAC8C6F-5236-4C3D-4ADB-86FFAE71D67C}"/>
+              </a:ext>
+            </a:extLst>
+          </p:cNvPr>
+          <p:cNvPicPr>
+            <a:picLocks noChangeAspect="1"/>
+          </p:cNvPicPr>
+          <p:nvPr/>
+        </p:nvPicPr>
+        <p:blipFill>
+          <a:blip r:embed="rId3">
+            <a:extLst>
+              <a:ext uri="{28A0092B-C50C-407E-A947-70E740481C1C}">
+                <a14:useLocalDpi xmlns:a14="http://schemas.microsoft.com/office/drawing/2010/main" val="0"/>
+              </a:ext>
+            </a:extLst>
+          </a:blip>
+          <a:stretch>
+            <a:fillRect/>
+          </a:stretch>
+        </p:blipFill>
+        <p:spPr>
+          <a:xfrm>
+            <a:off x="2796533" y="1155851"/>
+            <a:ext cx="6598933" cy="5465075"/>
+          </a:xfrm>
+          <a:prstGeom prst="rect">
+            <a:avLst/>
+          </a:prstGeom>
+        </p:spPr>
+      </p:pic>
+    </p:spTree>
+    <p:extLst>
+      <p:ext uri="{BB962C8B-B14F-4D97-AF65-F5344CB8AC3E}">
+        <p14:creationId xmlns:p14="http://schemas.microsoft.com/office/powerpoint/2010/main" val="701903127"/>
+      </p:ext>
+    </p:extLst>
+  </p:cSld>
+  <p:clrMapOvr>
+    <a:masterClrMapping/>
+  </p:clrMapOvr>
+</p:sld>
+</file>
+
+<file path=ppt/slides/slide17.xml><?xml version="1.0" encoding="utf-8"?>
+<p:sld xmlns:a="http://schemas.openxmlformats.org/drawingml/2006/main" xmlns:r="http://schemas.openxmlformats.org/officeDocument/2006/relationships" xmlns:p="http://schemas.openxmlformats.org/presentationml/2006/main">
+  <p:cSld>
+    <p:spTree>
+      <p:nvGrpSpPr>
+        <p:cNvPr id="1" name="">
+          <a:extLst>
+            <a:ext uri="{FF2B5EF4-FFF2-40B4-BE49-F238E27FC236}">
+              <a16:creationId xmlns:a16="http://schemas.microsoft.com/office/drawing/2014/main" id="{F49B1AFC-8B86-2BEB-43D5-CB26CC07E4D1}"/>
+            </a:ext>
+          </a:extLst>
+        </p:cNvPr>
+        <p:cNvGrpSpPr/>
+        <p:nvPr/>
+      </p:nvGrpSpPr>
+      <p:grpSpPr>
+        <a:xfrm>
+          <a:off x="0" y="0"/>
+          <a:ext cx="0" cy="0"/>
+          <a:chOff x="0" y="0"/>
+          <a:chExt cx="0" cy="0"/>
+        </a:xfrm>
+      </p:grpSpPr>
+      <p:sp>
+        <p:nvSpPr>
+          <p:cNvPr id="4" name="Title 3">
+            <a:extLst>
+              <a:ext uri="{FF2B5EF4-FFF2-40B4-BE49-F238E27FC236}">
+                <a16:creationId xmlns:a16="http://schemas.microsoft.com/office/drawing/2014/main" id="{427A2538-AA41-71FA-61B6-FE951563DB19}"/>
+              </a:ext>
+            </a:extLst>
+          </p:cNvPr>
+          <p:cNvSpPr>
+            <a:spLocks noGrp="1"/>
+          </p:cNvSpPr>
+          <p:nvPr>
+            <p:ph type="title"/>
+          </p:nvPr>
+        </p:nvSpPr>
+        <p:spPr>
+          <a:xfrm>
+            <a:off x="81116" y="0"/>
+            <a:ext cx="10515600" cy="1325563"/>
+          </a:xfrm>
+        </p:spPr>
+        <p:txBody>
+          <a:bodyPr/>
+          <a:lstStyle/>
+          <a:p>
+            <a:r>
+              <a:rPr lang="en-US" dirty="0"/>
+              <a:t>LVNV, EPN, T, and WT sirtalis</a:t>
+            </a:r>
+          </a:p>
+        </p:txBody>
+      </p:sp>
+      <p:pic>
+        <p:nvPicPr>
+          <p:cNvPr id="6" name="Picture 5">
+            <a:extLst>
+              <a:ext uri="{FF2B5EF4-FFF2-40B4-BE49-F238E27FC236}">
+                <a16:creationId xmlns:a16="http://schemas.microsoft.com/office/drawing/2014/main" id="{EC278E12-1BA9-99C0-B3E6-FDB4D1AF1D09}"/>
+              </a:ext>
+            </a:extLst>
+          </p:cNvPr>
+          <p:cNvPicPr>
+            <a:picLocks noChangeAspect="1"/>
+          </p:cNvPicPr>
+          <p:nvPr/>
+        </p:nvPicPr>
+        <p:blipFill>
+          <a:blip r:embed="rId3">
+            <a:extLst>
+              <a:ext uri="{28A0092B-C50C-407E-A947-70E740481C1C}">
+                <a14:useLocalDpi xmlns:a14="http://schemas.microsoft.com/office/drawing/2010/main" val="0"/>
+              </a:ext>
+            </a:extLst>
+          </a:blip>
+          <a:stretch>
+            <a:fillRect/>
+          </a:stretch>
+        </p:blipFill>
+        <p:spPr>
+          <a:xfrm>
+            <a:off x="2602718" y="1001263"/>
+            <a:ext cx="6986564" cy="5786102"/>
+          </a:xfrm>
+          <a:prstGeom prst="rect">
+            <a:avLst/>
+          </a:prstGeom>
+        </p:spPr>
+      </p:pic>
+    </p:spTree>
+    <p:extLst>
+      <p:ext uri="{BB962C8B-B14F-4D97-AF65-F5344CB8AC3E}">
+        <p14:creationId xmlns:p14="http://schemas.microsoft.com/office/powerpoint/2010/main" val="2024328479"/>
+      </p:ext>
+    </p:extLst>
+  </p:cSld>
+  <p:clrMapOvr>
+    <a:masterClrMapping/>
+  </p:clrMapOvr>
+</p:sld>
+</file>
+
+<file path=ppt/slides/slide18.xml><?xml version="1.0" encoding="utf-8"?>
+<p:sld xmlns:a="http://schemas.openxmlformats.org/drawingml/2006/main" xmlns:r="http://schemas.openxmlformats.org/officeDocument/2006/relationships" xmlns:p="http://schemas.openxmlformats.org/presentationml/2006/main">
+  <p:cSld>
+    <p:spTree>
+      <p:nvGrpSpPr>
+        <p:cNvPr id="1" name="">
+          <a:extLst>
+            <a:ext uri="{FF2B5EF4-FFF2-40B4-BE49-F238E27FC236}">
+              <a16:creationId xmlns:a16="http://schemas.microsoft.com/office/drawing/2014/main" id="{BA3FE163-3652-8D85-7226-16BF78E94D3B}"/>
+            </a:ext>
+          </a:extLst>
+        </p:cNvPr>
+        <p:cNvGrpSpPr/>
+        <p:nvPr/>
+      </p:nvGrpSpPr>
+      <p:grpSpPr>
+        <a:xfrm>
+          <a:off x="0" y="0"/>
+          <a:ext cx="0" cy="0"/>
+          <a:chOff x="0" y="0"/>
+          <a:chExt cx="0" cy="0"/>
+        </a:xfrm>
+      </p:grpSpPr>
+      <p:sp>
+        <p:nvSpPr>
+          <p:cNvPr id="4" name="Title 3">
+            <a:extLst>
+              <a:ext uri="{FF2B5EF4-FFF2-40B4-BE49-F238E27FC236}">
+                <a16:creationId xmlns:a16="http://schemas.microsoft.com/office/drawing/2014/main" id="{933E5EC4-F47F-D7DB-6D35-53F8B9280C63}"/>
+              </a:ext>
+            </a:extLst>
+          </p:cNvPr>
+          <p:cNvSpPr>
+            <a:spLocks noGrp="1"/>
+          </p:cNvSpPr>
+          <p:nvPr>
+            <p:ph type="title"/>
+          </p:nvPr>
+        </p:nvSpPr>
+        <p:spPr>
+          <a:xfrm>
+            <a:off x="90948" y="67362"/>
+            <a:ext cx="10515600" cy="1325563"/>
+          </a:xfrm>
+        </p:spPr>
+        <p:txBody>
+          <a:bodyPr/>
+          <a:lstStyle/>
+          <a:p>
+            <a:r>
+              <a:rPr lang="en-US" dirty="0"/>
+              <a:t>LVNV, WT sirtalis, T, and WT </a:t>
+            </a:r>
+            <a:r>
+              <a:rPr lang="en-US" dirty="0" err="1"/>
+              <a:t>hammondii</a:t>
+            </a:r>
+            <a:endParaRPr lang="en-US" dirty="0"/>
+          </a:p>
+        </p:txBody>
+      </p:sp>
+      <p:pic>
+        <p:nvPicPr>
+          <p:cNvPr id="14" name="Picture 13">
+            <a:extLst>
+              <a:ext uri="{FF2B5EF4-FFF2-40B4-BE49-F238E27FC236}">
+                <a16:creationId xmlns:a16="http://schemas.microsoft.com/office/drawing/2014/main" id="{B7A2896C-40EB-5300-6D87-E0679A1C4924}"/>
+              </a:ext>
+            </a:extLst>
+          </p:cNvPr>
+          <p:cNvPicPr>
+            <a:picLocks noChangeAspect="1"/>
+          </p:cNvPicPr>
+          <p:nvPr/>
+        </p:nvPicPr>
+        <p:blipFill>
+          <a:blip r:embed="rId3">
+            <a:extLst>
+              <a:ext uri="{28A0092B-C50C-407E-A947-70E740481C1C}">
+                <a14:useLocalDpi xmlns:a14="http://schemas.microsoft.com/office/drawing/2010/main" val="0"/>
+              </a:ext>
+            </a:extLst>
+          </a:blip>
+          <a:stretch>
+            <a:fillRect/>
+          </a:stretch>
+        </p:blipFill>
+        <p:spPr>
+          <a:xfrm>
+            <a:off x="2796533" y="1325563"/>
+            <a:ext cx="6598933" cy="5465075"/>
+          </a:xfrm>
+          <a:prstGeom prst="rect">
+            <a:avLst/>
+          </a:prstGeom>
+        </p:spPr>
+      </p:pic>
+    </p:spTree>
+    <p:extLst>
+      <p:ext uri="{BB962C8B-B14F-4D97-AF65-F5344CB8AC3E}">
+        <p14:creationId xmlns:p14="http://schemas.microsoft.com/office/powerpoint/2010/main" val="2130636375"/>
+      </p:ext>
+    </p:extLst>
+  </p:cSld>
+  <p:clrMapOvr>
+    <a:masterClrMapping/>
+  </p:clrMapOvr>
+</p:sld>
+</file>
+
+<file path=ppt/slides/slide19.xml><?xml version="1.0" encoding="utf-8"?>
+<p:sld xmlns:a="http://schemas.openxmlformats.org/drawingml/2006/main" xmlns:r="http://schemas.openxmlformats.org/officeDocument/2006/relationships" xmlns:p="http://schemas.openxmlformats.org/presentationml/2006/main">
+  <p:cSld>
+    <p:spTree>
+      <p:nvGrpSpPr>
+        <p:cNvPr id="1" name="">
+          <a:extLst>
+            <a:ext uri="{FF2B5EF4-FFF2-40B4-BE49-F238E27FC236}">
+              <a16:creationId xmlns:a16="http://schemas.microsoft.com/office/drawing/2014/main" id="{F001F2E3-B7FE-BC9A-D078-26F4DE252C7F}"/>
+            </a:ext>
+          </a:extLst>
+        </p:cNvPr>
+        <p:cNvGrpSpPr/>
+        <p:nvPr/>
+      </p:nvGrpSpPr>
+      <p:grpSpPr>
+        <a:xfrm>
+          <a:off x="0" y="0"/>
+          <a:ext cx="0" cy="0"/>
+          <a:chOff x="0" y="0"/>
+          <a:chExt cx="0" cy="0"/>
+        </a:xfrm>
+      </p:grpSpPr>
+      <p:pic>
+        <p:nvPicPr>
+          <p:cNvPr id="8" name="Picture 7">
+            <a:extLst>
+              <a:ext uri="{FF2B5EF4-FFF2-40B4-BE49-F238E27FC236}">
+                <a16:creationId xmlns:a16="http://schemas.microsoft.com/office/drawing/2014/main" id="{38A6683D-0A4C-6246-BAEE-57F47B38BC00}"/>
+              </a:ext>
+            </a:extLst>
+          </p:cNvPr>
+          <p:cNvPicPr>
+            <a:picLocks noChangeAspect="1"/>
+          </p:cNvPicPr>
+          <p:nvPr/>
+        </p:nvPicPr>
+        <p:blipFill>
+          <a:blip r:embed="rId3">
+            <a:extLst>
+              <a:ext uri="{28A0092B-C50C-407E-A947-70E740481C1C}">
+                <a14:useLocalDpi xmlns:a14="http://schemas.microsoft.com/office/drawing/2010/main" val="0"/>
+              </a:ext>
+            </a:extLst>
+          </a:blip>
+          <a:stretch>
+            <a:fillRect/>
+          </a:stretch>
+        </p:blipFill>
+        <p:spPr>
+          <a:xfrm>
+            <a:off x="2425422" y="1016982"/>
+            <a:ext cx="7052874" cy="5841018"/>
+          </a:xfrm>
+          <a:prstGeom prst="rect">
+            <a:avLst/>
+          </a:prstGeom>
+        </p:spPr>
+      </p:pic>
+      <p:sp>
+        <p:nvSpPr>
+          <p:cNvPr id="2" name="Title 3">
+            <a:extLst>
+              <a:ext uri="{FF2B5EF4-FFF2-40B4-BE49-F238E27FC236}">
+                <a16:creationId xmlns:a16="http://schemas.microsoft.com/office/drawing/2014/main" id="{0F526DD4-1F02-90A2-21E1-F5ED9FF065F5}"/>
+              </a:ext>
+            </a:extLst>
+          </p:cNvPr>
+          <p:cNvSpPr txBox="1">
+            <a:spLocks/>
+          </p:cNvSpPr>
+          <p:nvPr/>
+        </p:nvSpPr>
+        <p:spPr>
+          <a:xfrm>
+            <a:off x="90948" y="67362"/>
+            <a:ext cx="10515600" cy="1325563"/>
+          </a:xfrm>
+          <a:prstGeom prst="rect">
+            <a:avLst/>
+          </a:prstGeom>
+        </p:spPr>
+        <p:txBody>
+          <a:bodyPr vert="horz" lIns="91440" tIns="45720" rIns="91440" bIns="45720" rtlCol="0" anchor="ctr">
+            <a:normAutofit/>
+          </a:bodyPr>
+          <a:lstStyle>
+            <a:lvl1pPr algn="l" defTabSz="914400" rtl="0" eaLnBrk="1" latinLnBrk="0" hangingPunct="1">
+              <a:lnSpc>
+                <a:spcPct val="90000"/>
+              </a:lnSpc>
+              <a:spcBef>
+                <a:spcPct val="0"/>
+              </a:spcBef>
+              <a:buNone/>
+              <a:defRPr sz="4400" kern="1200">
+                <a:solidFill>
+                  <a:schemeClr val="tx1"/>
+                </a:solidFill>
+                <a:latin typeface="+mj-lt"/>
+                <a:ea typeface="+mj-ea"/>
+                <a:cs typeface="+mj-cs"/>
+              </a:defRPr>
+            </a:lvl1pPr>
+          </a:lstStyle>
+          <a:p>
+            <a:r>
+              <a:rPr lang="en-US"/>
+              <a:t>LVNV, WT sirtalis, T, and WT hammondii</a:t>
+            </a:r>
+            <a:endParaRPr lang="en-US" dirty="0"/>
+          </a:p>
+        </p:txBody>
+      </p:sp>
+    </p:spTree>
+    <p:extLst>
+      <p:ext uri="{BB962C8B-B14F-4D97-AF65-F5344CB8AC3E}">
+        <p14:creationId xmlns:p14="http://schemas.microsoft.com/office/powerpoint/2010/main" val="2730062183"/>
+      </p:ext>
+    </p:extLst>
+  </p:cSld>
+  <p:clrMapOvr>
+    <a:masterClrMapping/>
+  </p:clrMapOvr>
+</p:sld>
+</file>
+
+<file path=ppt/slides/slide2.xml><?xml version="1.0" encoding="utf-8"?>
+<p:sld xmlns:a="http://schemas.openxmlformats.org/drawingml/2006/main" xmlns:r="http://schemas.openxmlformats.org/officeDocument/2006/relationships" xmlns:p="http://schemas.openxmlformats.org/presentationml/2006/main">
+  <p:cSld>
+    <p:spTree>
+      <p:nvGrpSpPr>
+        <p:cNvPr id="1" name=""/>
+        <p:cNvGrpSpPr/>
+        <p:nvPr/>
+      </p:nvGrpSpPr>
+      <p:grpSpPr>
+        <a:xfrm>
+          <a:off x="0" y="0"/>
+          <a:ext cx="0" cy="0"/>
+          <a:chOff x="0" y="0"/>
+          <a:chExt cx="0" cy="0"/>
+        </a:xfrm>
+      </p:grpSpPr>
+      <p:sp>
+        <p:nvSpPr>
+          <p:cNvPr id="4" name="Title 3">
+            <a:extLst>
+              <a:ext uri="{FF2B5EF4-FFF2-40B4-BE49-F238E27FC236}">
+                <a16:creationId xmlns:a16="http://schemas.microsoft.com/office/drawing/2014/main" id="{3BB4873F-15A7-243F-3F5E-1339E0076EF6}"/>
+              </a:ext>
+            </a:extLst>
+          </p:cNvPr>
+          <p:cNvSpPr>
+            <a:spLocks noGrp="1"/>
+          </p:cNvSpPr>
+          <p:nvPr>
+            <p:ph type="title"/>
+          </p:nvPr>
+        </p:nvSpPr>
+        <p:spPr/>
+        <p:txBody>
+          <a:bodyPr/>
+          <a:lstStyle/>
+          <a:p>
+            <a:r>
+              <a:rPr lang="en-US" dirty="0"/>
+              <a:t>Transient contractions (C4P)</a:t>
+            </a:r>
+          </a:p>
+        </p:txBody>
+      </p:sp>
+      <p:sp>
+        <p:nvSpPr>
+          <p:cNvPr id="5" name="Text Placeholder 4">
+            <a:extLst>
+              <a:ext uri="{FF2B5EF4-FFF2-40B4-BE49-F238E27FC236}">
+                <a16:creationId xmlns:a16="http://schemas.microsoft.com/office/drawing/2014/main" id="{3879C9DE-A46A-AA88-41BA-2B9B8190A14C}"/>
+              </a:ext>
+            </a:extLst>
+          </p:cNvPr>
+          <p:cNvSpPr>
+            <a:spLocks noGrp="1"/>
+          </p:cNvSpPr>
+          <p:nvPr>
+            <p:ph type="body" idx="1"/>
+          </p:nvPr>
+        </p:nvSpPr>
+        <p:spPr/>
+        <p:txBody>
+          <a:bodyPr/>
+          <a:lstStyle/>
+          <a:p>
+            <a:r>
+              <a:rPr lang="en-US" dirty="0"/>
+              <a:t>I apologize that the genotype colors are inconsistent across plots, I realized this as I was putting it together and I don’t have time to fix it tonight but I will get it fixed by whenever we next meet</a:t>
+            </a:r>
+          </a:p>
+        </p:txBody>
+      </p:sp>
+    </p:spTree>
+    <p:extLst>
+      <p:ext uri="{BB962C8B-B14F-4D97-AF65-F5344CB8AC3E}">
+        <p14:creationId xmlns:p14="http://schemas.microsoft.com/office/powerpoint/2010/main" val="2886554321"/>
+      </p:ext>
+    </p:extLst>
+  </p:cSld>
+  <p:clrMapOvr>
+    <a:masterClrMapping/>
+  </p:clrMapOvr>
+</p:sld>
+</file>
+
+<file path=ppt/slides/slide20.xml><?xml version="1.0" encoding="utf-8"?>
+<p:sld xmlns:a="http://schemas.openxmlformats.org/drawingml/2006/main" xmlns:r="http://schemas.openxmlformats.org/officeDocument/2006/relationships" xmlns:p="http://schemas.openxmlformats.org/presentationml/2006/main">
+  <p:cSld>
+    <p:spTree>
+      <p:nvGrpSpPr>
+        <p:cNvPr id="1" name="">
+          <a:extLst>
+            <a:ext uri="{FF2B5EF4-FFF2-40B4-BE49-F238E27FC236}">
+              <a16:creationId xmlns:a16="http://schemas.microsoft.com/office/drawing/2014/main" id="{4460BEC3-72FD-0E53-909F-5F535746AA26}"/>
+            </a:ext>
+          </a:extLst>
+        </p:cNvPr>
+        <p:cNvGrpSpPr/>
+        <p:nvPr/>
+      </p:nvGrpSpPr>
+      <p:grpSpPr>
+        <a:xfrm>
+          <a:off x="0" y="0"/>
+          <a:ext cx="0" cy="0"/>
+          <a:chOff x="0" y="0"/>
+          <a:chExt cx="0" cy="0"/>
+        </a:xfrm>
+      </p:grpSpPr>
+      <p:pic>
+        <p:nvPicPr>
+          <p:cNvPr id="10" name="Picture 9">
+            <a:extLst>
+              <a:ext uri="{FF2B5EF4-FFF2-40B4-BE49-F238E27FC236}">
+                <a16:creationId xmlns:a16="http://schemas.microsoft.com/office/drawing/2014/main" id="{B8DFD697-9042-586E-5236-022A5816D0AB}"/>
+              </a:ext>
+            </a:extLst>
+          </p:cNvPr>
+          <p:cNvPicPr>
+            <a:picLocks noChangeAspect="1"/>
+          </p:cNvPicPr>
+          <p:nvPr/>
+        </p:nvPicPr>
+        <p:blipFill>
+          <a:blip r:embed="rId3">
+            <a:extLst>
+              <a:ext uri="{28A0092B-C50C-407E-A947-70E740481C1C}">
+                <a14:useLocalDpi xmlns:a14="http://schemas.microsoft.com/office/drawing/2010/main" val="0"/>
+              </a:ext>
+            </a:extLst>
+          </a:blip>
+          <a:stretch>
+            <a:fillRect/>
+          </a:stretch>
+        </p:blipFill>
+        <p:spPr>
+          <a:xfrm>
+            <a:off x="2870391" y="1124280"/>
+            <a:ext cx="6598933" cy="5465075"/>
+          </a:xfrm>
+          <a:prstGeom prst="rect">
+            <a:avLst/>
+          </a:prstGeom>
+        </p:spPr>
+      </p:pic>
+      <p:sp>
+        <p:nvSpPr>
+          <p:cNvPr id="2" name="Title 3">
+            <a:extLst>
+              <a:ext uri="{FF2B5EF4-FFF2-40B4-BE49-F238E27FC236}">
+                <a16:creationId xmlns:a16="http://schemas.microsoft.com/office/drawing/2014/main" id="{F513DE2B-F1AD-A55F-C524-CAAE9815B878}"/>
+              </a:ext>
+            </a:extLst>
+          </p:cNvPr>
+          <p:cNvSpPr txBox="1">
+            <a:spLocks/>
+          </p:cNvSpPr>
+          <p:nvPr/>
+        </p:nvSpPr>
+        <p:spPr>
+          <a:xfrm>
+            <a:off x="90948" y="67362"/>
+            <a:ext cx="10515600" cy="1325563"/>
+          </a:xfrm>
+          <a:prstGeom prst="rect">
+            <a:avLst/>
+          </a:prstGeom>
+        </p:spPr>
+        <p:txBody>
+          <a:bodyPr vert="horz" lIns="91440" tIns="45720" rIns="91440" bIns="45720" rtlCol="0" anchor="ctr">
+            <a:normAutofit/>
+          </a:bodyPr>
+          <a:lstStyle>
+            <a:lvl1pPr algn="l" defTabSz="914400" rtl="0" eaLnBrk="1" latinLnBrk="0" hangingPunct="1">
+              <a:lnSpc>
+                <a:spcPct val="90000"/>
+              </a:lnSpc>
+              <a:spcBef>
+                <a:spcPct val="0"/>
+              </a:spcBef>
+              <a:buNone/>
+              <a:defRPr sz="4400" kern="1200">
+                <a:solidFill>
+                  <a:schemeClr val="tx1"/>
+                </a:solidFill>
+                <a:latin typeface="+mj-lt"/>
+                <a:ea typeface="+mj-ea"/>
+                <a:cs typeface="+mj-cs"/>
+              </a:defRPr>
+            </a:lvl1pPr>
+          </a:lstStyle>
+          <a:p>
+            <a:r>
+              <a:rPr lang="en-US"/>
+              <a:t>LVNV, WT sirtalis, T, and WT hammondii</a:t>
+            </a:r>
+            <a:endParaRPr lang="en-US" dirty="0"/>
+          </a:p>
+        </p:txBody>
+      </p:sp>
+    </p:spTree>
+    <p:extLst>
+      <p:ext uri="{BB962C8B-B14F-4D97-AF65-F5344CB8AC3E}">
+        <p14:creationId xmlns:p14="http://schemas.microsoft.com/office/powerpoint/2010/main" val="4275669859"/>
+      </p:ext>
+    </p:extLst>
+  </p:cSld>
+  <p:clrMapOvr>
+    <a:masterClrMapping/>
+  </p:clrMapOvr>
+</p:sld>
+</file>
+
+<file path=ppt/slides/slide21.xml><?xml version="1.0" encoding="utf-8"?>
+<p:sld xmlns:a="http://schemas.openxmlformats.org/drawingml/2006/main" xmlns:r="http://schemas.openxmlformats.org/officeDocument/2006/relationships" xmlns:p="http://schemas.openxmlformats.org/presentationml/2006/main">
+  <p:cSld>
+    <p:spTree>
+      <p:nvGrpSpPr>
+        <p:cNvPr id="1" name="">
+          <a:extLst>
+            <a:ext uri="{FF2B5EF4-FFF2-40B4-BE49-F238E27FC236}">
+              <a16:creationId xmlns:a16="http://schemas.microsoft.com/office/drawing/2014/main" id="{C1043B44-34D3-19EA-DD84-E70773487328}"/>
+            </a:ext>
+          </a:extLst>
+        </p:cNvPr>
+        <p:cNvGrpSpPr/>
+        <p:nvPr/>
+      </p:nvGrpSpPr>
+      <p:grpSpPr>
+        <a:xfrm>
+          <a:off x="0" y="0"/>
+          <a:ext cx="0" cy="0"/>
+          <a:chOff x="0" y="0"/>
+          <a:chExt cx="0" cy="0"/>
+        </a:xfrm>
+      </p:grpSpPr>
+      <p:pic>
+        <p:nvPicPr>
+          <p:cNvPr id="12" name="Picture 11">
+            <a:extLst>
+              <a:ext uri="{FF2B5EF4-FFF2-40B4-BE49-F238E27FC236}">
+                <a16:creationId xmlns:a16="http://schemas.microsoft.com/office/drawing/2014/main" id="{584685CD-EDF6-07EE-727F-E35EC68EA9F1}"/>
+              </a:ext>
+            </a:extLst>
+          </p:cNvPr>
+          <p:cNvPicPr>
+            <a:picLocks noChangeAspect="1"/>
+          </p:cNvPicPr>
+          <p:nvPr/>
+        </p:nvPicPr>
+        <p:blipFill>
+          <a:blip r:embed="rId3">
+            <a:extLst>
+              <a:ext uri="{28A0092B-C50C-407E-A947-70E740481C1C}">
+                <a14:useLocalDpi xmlns:a14="http://schemas.microsoft.com/office/drawing/2010/main" val="0"/>
+              </a:ext>
+            </a:extLst>
+          </a:blip>
+          <a:stretch>
+            <a:fillRect/>
+          </a:stretch>
+        </p:blipFill>
+        <p:spPr>
+          <a:xfrm>
+            <a:off x="2912236" y="1116036"/>
+            <a:ext cx="6598933" cy="5465075"/>
+          </a:xfrm>
+          <a:prstGeom prst="rect">
+            <a:avLst/>
+          </a:prstGeom>
+        </p:spPr>
+      </p:pic>
+      <p:sp>
+        <p:nvSpPr>
+          <p:cNvPr id="2" name="Title 3">
+            <a:extLst>
+              <a:ext uri="{FF2B5EF4-FFF2-40B4-BE49-F238E27FC236}">
+                <a16:creationId xmlns:a16="http://schemas.microsoft.com/office/drawing/2014/main" id="{A5044021-225C-787E-D993-31352B208DBF}"/>
+              </a:ext>
+            </a:extLst>
+          </p:cNvPr>
+          <p:cNvSpPr txBox="1">
+            <a:spLocks/>
+          </p:cNvSpPr>
+          <p:nvPr/>
+        </p:nvSpPr>
+        <p:spPr>
+          <a:xfrm>
+            <a:off x="90948" y="67362"/>
+            <a:ext cx="10515600" cy="1325563"/>
+          </a:xfrm>
+          <a:prstGeom prst="rect">
+            <a:avLst/>
+          </a:prstGeom>
+        </p:spPr>
+        <p:txBody>
+          <a:bodyPr vert="horz" lIns="91440" tIns="45720" rIns="91440" bIns="45720" rtlCol="0" anchor="ctr">
+            <a:normAutofit/>
+          </a:bodyPr>
+          <a:lstStyle>
+            <a:lvl1pPr algn="l" defTabSz="914400" rtl="0" eaLnBrk="1" latinLnBrk="0" hangingPunct="1">
+              <a:lnSpc>
+                <a:spcPct val="90000"/>
+              </a:lnSpc>
+              <a:spcBef>
+                <a:spcPct val="0"/>
+              </a:spcBef>
+              <a:buNone/>
+              <a:defRPr sz="4400" kern="1200">
+                <a:solidFill>
+                  <a:schemeClr val="tx1"/>
+                </a:solidFill>
+                <a:latin typeface="+mj-lt"/>
+                <a:ea typeface="+mj-ea"/>
+                <a:cs typeface="+mj-cs"/>
+              </a:defRPr>
+            </a:lvl1pPr>
+          </a:lstStyle>
+          <a:p>
+            <a:r>
+              <a:rPr lang="en-US"/>
+              <a:t>LVNV, WT sirtalis, T, and WT hammondii</a:t>
+            </a:r>
+            <a:endParaRPr lang="en-US" dirty="0"/>
+          </a:p>
+        </p:txBody>
+      </p:sp>
+    </p:spTree>
+    <p:extLst>
+      <p:ext uri="{BB962C8B-B14F-4D97-AF65-F5344CB8AC3E}">
+        <p14:creationId xmlns:p14="http://schemas.microsoft.com/office/powerpoint/2010/main" val="1172107471"/>
+      </p:ext>
+    </p:extLst>
+  </p:cSld>
+  <p:clrMapOvr>
+    <a:masterClrMapping/>
+  </p:clrMapOvr>
+</p:sld>
+</file>
+
+<file path=ppt/slides/slide22.xml><?xml version="1.0" encoding="utf-8"?>
+<p:sld xmlns:a="http://schemas.openxmlformats.org/drawingml/2006/main" xmlns:r="http://schemas.openxmlformats.org/officeDocument/2006/relationships" xmlns:p="http://schemas.openxmlformats.org/presentationml/2006/main">
+  <p:cSld>
+    <p:spTree>
+      <p:nvGrpSpPr>
+        <p:cNvPr id="1" name=""/>
+        <p:cNvGrpSpPr/>
+        <p:nvPr/>
+      </p:nvGrpSpPr>
+      <p:grpSpPr>
+        <a:xfrm>
+          <a:off x="0" y="0"/>
+          <a:ext cx="0" cy="0"/>
+          <a:chOff x="0" y="0"/>
+          <a:chExt cx="0" cy="0"/>
+        </a:xfrm>
+      </p:grpSpPr>
+      <p:sp>
+        <p:nvSpPr>
+          <p:cNvPr id="3" name="Title 2">
+            <a:extLst>
+              <a:ext uri="{FF2B5EF4-FFF2-40B4-BE49-F238E27FC236}">
+                <a16:creationId xmlns:a16="http://schemas.microsoft.com/office/drawing/2014/main" id="{2E352018-A25E-B43D-5D53-3A06345616FE}"/>
+              </a:ext>
+            </a:extLst>
+          </p:cNvPr>
+          <p:cNvSpPr>
+            <a:spLocks noGrp="1"/>
+          </p:cNvSpPr>
+          <p:nvPr>
+            <p:ph type="title"/>
+          </p:nvPr>
+        </p:nvSpPr>
+        <p:spPr/>
+        <p:txBody>
+          <a:bodyPr/>
+          <a:lstStyle/>
+          <a:p>
+            <a:r>
+              <a:rPr lang="en-US" dirty="0"/>
+              <a:t>Rheobase protocol</a:t>
+            </a:r>
+          </a:p>
+        </p:txBody>
+      </p:sp>
+      <p:sp>
+        <p:nvSpPr>
+          <p:cNvPr id="4" name="Text Placeholder 3">
+            <a:extLst>
+              <a:ext uri="{FF2B5EF4-FFF2-40B4-BE49-F238E27FC236}">
+                <a16:creationId xmlns:a16="http://schemas.microsoft.com/office/drawing/2014/main" id="{B9F7088C-394E-DDDE-A7B3-3A0D1F4BD1B2}"/>
+              </a:ext>
+            </a:extLst>
+          </p:cNvPr>
+          <p:cNvSpPr>
+            <a:spLocks noGrp="1"/>
+          </p:cNvSpPr>
+          <p:nvPr>
+            <p:ph type="body" idx="1"/>
+          </p:nvPr>
+        </p:nvSpPr>
+        <p:spPr/>
+        <p:txBody>
+          <a:bodyPr>
+            <a:normAutofit fontScale="92500"/>
+          </a:bodyPr>
+          <a:lstStyle/>
+          <a:p>
+            <a:r>
+              <a:rPr lang="en-US" dirty="0"/>
+              <a:t>I did not get here because I was over-ambitious and also had to redo all the previous plots multiple times because of a series of silly errors but I will also have this before our next meeting (hopefully by the end of the week if you’re curious and want to see them sooner, we can probably meet via zoom while I’m gone if you want)</a:t>
+            </a:r>
+          </a:p>
+        </p:txBody>
+      </p:sp>
+    </p:spTree>
+    <p:extLst>
+      <p:ext uri="{BB962C8B-B14F-4D97-AF65-F5344CB8AC3E}">
+        <p14:creationId xmlns:p14="http://schemas.microsoft.com/office/powerpoint/2010/main" val="2411144924"/>
+      </p:ext>
+    </p:extLst>
+  </p:cSld>
+  <p:clrMapOvr>
+    <a:masterClrMapping/>
+  </p:clrMapOvr>
+</p:sld>
+</file>
+
+<file path=ppt/slides/slide3.xml><?xml version="1.0" encoding="utf-8"?>
+<p:sld xmlns:a="http://schemas.openxmlformats.org/drawingml/2006/main" xmlns:r="http://schemas.openxmlformats.org/officeDocument/2006/relationships" xmlns:p="http://schemas.openxmlformats.org/presentationml/2006/main">
+  <p:cSld>
+    <p:spTree>
+      <p:nvGrpSpPr>
+        <p:cNvPr id="1" name=""/>
+        <p:cNvGrpSpPr/>
+        <p:nvPr/>
+      </p:nvGrpSpPr>
+      <p:grpSpPr>
+        <a:xfrm>
+          <a:off x="0" y="0"/>
+          <a:ext cx="0" cy="0"/>
+          <a:chOff x="0" y="0"/>
+          <a:chExt cx="0" cy="0"/>
+        </a:xfrm>
+      </p:grpSpPr>
+      <p:sp>
+        <p:nvSpPr>
+          <p:cNvPr id="4" name="Title 3">
+            <a:extLst>
+              <a:ext uri="{FF2B5EF4-FFF2-40B4-BE49-F238E27FC236}">
+                <a16:creationId xmlns:a16="http://schemas.microsoft.com/office/drawing/2014/main" id="{3AC523F2-51FA-EFF8-87FC-2F8CF76C4544}"/>
+              </a:ext>
+            </a:extLst>
+          </p:cNvPr>
+          <p:cNvSpPr>
+            <a:spLocks noGrp="1"/>
+          </p:cNvSpPr>
+          <p:nvPr>
+            <p:ph type="title"/>
+          </p:nvPr>
+        </p:nvSpPr>
+        <p:spPr/>
+        <p:txBody>
+          <a:bodyPr/>
+          <a:lstStyle/>
+          <a:p>
+            <a:r>
+              <a:rPr lang="en-US" dirty="0"/>
+              <a:t>All</a:t>
+            </a:r>
+          </a:p>
+        </p:txBody>
+      </p:sp>
+      <p:pic>
+        <p:nvPicPr>
+          <p:cNvPr id="6" name="Picture 5">
+            <a:extLst>
+              <a:ext uri="{FF2B5EF4-FFF2-40B4-BE49-F238E27FC236}">
+                <a16:creationId xmlns:a16="http://schemas.microsoft.com/office/drawing/2014/main" id="{BBE36E2F-E4EC-2785-3414-84BD1037F32E}"/>
+              </a:ext>
+            </a:extLst>
+          </p:cNvPr>
+          <p:cNvPicPr>
+            <a:picLocks noChangeAspect="1"/>
+          </p:cNvPicPr>
+          <p:nvPr/>
+        </p:nvPicPr>
+        <p:blipFill>
+          <a:blip r:embed="rId2">
+            <a:extLst>
+              <a:ext uri="{28A0092B-C50C-407E-A947-70E740481C1C}">
+                <a14:useLocalDpi xmlns:a14="http://schemas.microsoft.com/office/drawing/2010/main" val="0"/>
+              </a:ext>
+            </a:extLst>
+          </a:blip>
+          <a:stretch>
+            <a:fillRect/>
+          </a:stretch>
+        </p:blipFill>
+        <p:spPr>
+          <a:xfrm>
+            <a:off x="1738489" y="365125"/>
+            <a:ext cx="9200444" cy="6313638"/>
+          </a:xfrm>
+          <a:prstGeom prst="rect">
+            <a:avLst/>
+          </a:prstGeom>
+        </p:spPr>
+      </p:pic>
+    </p:spTree>
+    <p:extLst>
+      <p:ext uri="{BB962C8B-B14F-4D97-AF65-F5344CB8AC3E}">
+        <p14:creationId xmlns:p14="http://schemas.microsoft.com/office/powerpoint/2010/main" val="1316905677"/>
+      </p:ext>
+    </p:extLst>
+  </p:cSld>
+  <p:clrMapOvr>
+    <a:masterClrMapping/>
+  </p:clrMapOvr>
+</p:sld>
+</file>
+
+<file path=ppt/slides/slide4.xml><?xml version="1.0" encoding="utf-8"?>
+<p:sld xmlns:a="http://schemas.openxmlformats.org/drawingml/2006/main" xmlns:r="http://schemas.openxmlformats.org/officeDocument/2006/relationships" xmlns:p="http://schemas.openxmlformats.org/presentationml/2006/main">
+  <p:cSld>
+    <p:spTree>
+      <p:nvGrpSpPr>
+        <p:cNvPr id="1" name=""/>
+        <p:cNvGrpSpPr/>
+        <p:nvPr/>
+      </p:nvGrpSpPr>
+      <p:grpSpPr>
+        <a:xfrm>
+          <a:off x="0" y="0"/>
+          <a:ext cx="0" cy="0"/>
+          <a:chOff x="0" y="0"/>
+          <a:chExt cx="0" cy="0"/>
+        </a:xfrm>
+      </p:grpSpPr>
+      <p:pic>
+        <p:nvPicPr>
+          <p:cNvPr id="5" name="Picture 4">
+            <a:extLst>
+              <a:ext uri="{FF2B5EF4-FFF2-40B4-BE49-F238E27FC236}">
+                <a16:creationId xmlns:a16="http://schemas.microsoft.com/office/drawing/2014/main" id="{802CC107-9FFD-BBFB-A181-68528F936C36}"/>
+              </a:ext>
+            </a:extLst>
+          </p:cNvPr>
+          <p:cNvPicPr>
+            <a:picLocks noChangeAspect="1"/>
+          </p:cNvPicPr>
+          <p:nvPr/>
+        </p:nvPicPr>
+        <p:blipFill>
+          <a:blip r:embed="rId3">
+            <a:extLst>
+              <a:ext uri="{28A0092B-C50C-407E-A947-70E740481C1C}">
+                <a14:useLocalDpi xmlns:a14="http://schemas.microsoft.com/office/drawing/2010/main" val="0"/>
+              </a:ext>
+            </a:extLst>
+          </a:blip>
+          <a:stretch>
+            <a:fillRect/>
+          </a:stretch>
+        </p:blipFill>
+        <p:spPr>
+          <a:xfrm>
+            <a:off x="995280" y="265758"/>
+            <a:ext cx="7959957" cy="6592242"/>
+          </a:xfrm>
+          <a:prstGeom prst="rect">
+            <a:avLst/>
+          </a:prstGeom>
+        </p:spPr>
+      </p:pic>
+      <p:sp>
+        <p:nvSpPr>
+          <p:cNvPr id="2" name="Title 3">
+            <a:extLst>
+              <a:ext uri="{FF2B5EF4-FFF2-40B4-BE49-F238E27FC236}">
+                <a16:creationId xmlns:a16="http://schemas.microsoft.com/office/drawing/2014/main" id="{69000D8A-D2B6-F5E9-D10B-BB92EFCCB37D}"/>
+              </a:ext>
+            </a:extLst>
+          </p:cNvPr>
+          <p:cNvSpPr txBox="1">
+            <a:spLocks/>
+          </p:cNvSpPr>
+          <p:nvPr/>
+        </p:nvSpPr>
+        <p:spPr>
+          <a:xfrm>
+            <a:off x="4631918" y="170671"/>
+            <a:ext cx="7359704" cy="629121"/>
+          </a:xfrm>
+          <a:prstGeom prst="rect">
+            <a:avLst/>
+          </a:prstGeom>
+        </p:spPr>
+        <p:txBody>
+          <a:bodyPr/>
+          <a:lstStyle>
+            <a:lvl1pPr algn="l" defTabSz="914400" rtl="0" eaLnBrk="1" latinLnBrk="0" hangingPunct="1">
+              <a:lnSpc>
+                <a:spcPct val="90000"/>
+              </a:lnSpc>
+              <a:spcBef>
+                <a:spcPct val="0"/>
+              </a:spcBef>
+              <a:buNone/>
+              <a:defRPr sz="4400" kern="1200">
+                <a:solidFill>
+                  <a:schemeClr val="tx1"/>
+                </a:solidFill>
+                <a:latin typeface="+mj-lt"/>
+                <a:ea typeface="+mj-ea"/>
+                <a:cs typeface="+mj-cs"/>
+              </a:defRPr>
+            </a:lvl1pPr>
+          </a:lstStyle>
+          <a:p>
+            <a:r>
+              <a:rPr lang="en-US" dirty="0"/>
+              <a:t>Prev minus WT elegans and P</a:t>
+            </a:r>
+          </a:p>
+        </p:txBody>
+      </p:sp>
+    </p:spTree>
+    <p:extLst>
+      <p:ext uri="{BB962C8B-B14F-4D97-AF65-F5344CB8AC3E}">
+        <p14:creationId xmlns:p14="http://schemas.microsoft.com/office/powerpoint/2010/main" val="4208517190"/>
+      </p:ext>
+    </p:extLst>
+  </p:cSld>
+  <p:clrMapOvr>
+    <a:masterClrMapping/>
+  </p:clrMapOvr>
+</p:sld>
+</file>
+
+<file path=ppt/slides/slide5.xml><?xml version="1.0" encoding="utf-8"?>
+<p:sld xmlns:a="http://schemas.openxmlformats.org/drawingml/2006/main" xmlns:r="http://schemas.openxmlformats.org/officeDocument/2006/relationships" xmlns:p="http://schemas.openxmlformats.org/presentationml/2006/main">
+  <p:cSld>
+    <p:spTree>
+      <p:nvGrpSpPr>
+        <p:cNvPr id="1" name=""/>
+        <p:cNvGrpSpPr/>
+        <p:nvPr/>
+      </p:nvGrpSpPr>
+      <p:grpSpPr>
+        <a:xfrm>
+          <a:off x="0" y="0"/>
+          <a:ext cx="0" cy="0"/>
+          <a:chOff x="0" y="0"/>
+          <a:chExt cx="0" cy="0"/>
+        </a:xfrm>
+      </p:grpSpPr>
+      <p:pic>
+        <p:nvPicPr>
+          <p:cNvPr id="3" name="Picture 2">
+            <a:extLst>
+              <a:ext uri="{FF2B5EF4-FFF2-40B4-BE49-F238E27FC236}">
+                <a16:creationId xmlns:a16="http://schemas.microsoft.com/office/drawing/2014/main" id="{9E1181FD-800A-91F5-EE1F-ECB408BCBE31}"/>
+              </a:ext>
+            </a:extLst>
+          </p:cNvPr>
+          <p:cNvPicPr>
+            <a:picLocks noChangeAspect="1"/>
+          </p:cNvPicPr>
+          <p:nvPr/>
+        </p:nvPicPr>
+        <p:blipFill>
+          <a:blip r:embed="rId2">
+            <a:extLst>
+              <a:ext uri="{28A0092B-C50C-407E-A947-70E740481C1C}">
+                <a14:useLocalDpi xmlns:a14="http://schemas.microsoft.com/office/drawing/2010/main" val="0"/>
+              </a:ext>
+            </a:extLst>
+          </a:blip>
+          <a:stretch>
+            <a:fillRect/>
+          </a:stretch>
+        </p:blipFill>
+        <p:spPr>
+          <a:xfrm>
+            <a:off x="1765573" y="360168"/>
+            <a:ext cx="8941938" cy="6136243"/>
+          </a:xfrm>
+          <a:prstGeom prst="rect">
+            <a:avLst/>
+          </a:prstGeom>
+        </p:spPr>
+      </p:pic>
+      <p:sp>
+        <p:nvSpPr>
+          <p:cNvPr id="4" name="Title 3">
+            <a:extLst>
+              <a:ext uri="{FF2B5EF4-FFF2-40B4-BE49-F238E27FC236}">
+                <a16:creationId xmlns:a16="http://schemas.microsoft.com/office/drawing/2014/main" id="{330EB7E6-904B-9CF3-4089-D74ED26A367C}"/>
+              </a:ext>
+            </a:extLst>
+          </p:cNvPr>
+          <p:cNvSpPr>
+            <a:spLocks noGrp="1"/>
+          </p:cNvSpPr>
+          <p:nvPr>
+            <p:ph type="title"/>
+          </p:nvPr>
+        </p:nvSpPr>
+        <p:spPr>
+          <a:xfrm>
+            <a:off x="191911" y="-158044"/>
+            <a:ext cx="10515600" cy="1325563"/>
+          </a:xfrm>
+        </p:spPr>
+        <p:txBody>
+          <a:bodyPr/>
+          <a:lstStyle/>
+          <a:p>
+            <a:r>
+              <a:rPr lang="en-US" dirty="0"/>
+              <a:t>All WT</a:t>
+            </a:r>
+          </a:p>
+        </p:txBody>
+      </p:sp>
+    </p:spTree>
+    <p:extLst>
+      <p:ext uri="{BB962C8B-B14F-4D97-AF65-F5344CB8AC3E}">
+        <p14:creationId xmlns:p14="http://schemas.microsoft.com/office/powerpoint/2010/main" val="2012754573"/>
+      </p:ext>
+    </p:extLst>
+  </p:cSld>
+  <p:clrMapOvr>
+    <a:masterClrMapping/>
+  </p:clrMapOvr>
+</p:sld>
+</file>
+
+<file path=ppt/slides/slide6.xml><?xml version="1.0" encoding="utf-8"?>
+<p:sld xmlns:a="http://schemas.openxmlformats.org/drawingml/2006/main" xmlns:r="http://schemas.openxmlformats.org/officeDocument/2006/relationships" xmlns:p="http://schemas.openxmlformats.org/presentationml/2006/main">
+  <p:cSld>
+    <p:spTree>
+      <p:nvGrpSpPr>
+        <p:cNvPr id="1" name=""/>
+        <p:cNvGrpSpPr/>
+        <p:nvPr/>
+      </p:nvGrpSpPr>
+      <p:grpSpPr>
+        <a:xfrm>
+          <a:off x="0" y="0"/>
+          <a:ext cx="0" cy="0"/>
+          <a:chOff x="0" y="0"/>
+          <a:chExt cx="0" cy="0"/>
+        </a:xfrm>
+      </p:grpSpPr>
+      <p:pic>
+        <p:nvPicPr>
+          <p:cNvPr id="31" name="Picture 30">
+            <a:extLst>
+              <a:ext uri="{FF2B5EF4-FFF2-40B4-BE49-F238E27FC236}">
+                <a16:creationId xmlns:a16="http://schemas.microsoft.com/office/drawing/2014/main" id="{4F500660-B97C-7AFD-62DA-A418B27FFFE5}"/>
+              </a:ext>
+            </a:extLst>
+          </p:cNvPr>
+          <p:cNvPicPr>
+            <a:picLocks noChangeAspect="1"/>
+          </p:cNvPicPr>
+          <p:nvPr/>
+        </p:nvPicPr>
+        <p:blipFill>
+          <a:blip r:embed="rId3">
+            <a:extLst>
+              <a:ext uri="{28A0092B-C50C-407E-A947-70E740481C1C}">
+                <a14:useLocalDpi xmlns:a14="http://schemas.microsoft.com/office/drawing/2010/main" val="0"/>
+              </a:ext>
+            </a:extLst>
+          </a:blip>
+          <a:stretch>
+            <a:fillRect/>
+          </a:stretch>
+        </p:blipFill>
+        <p:spPr>
+          <a:xfrm>
+            <a:off x="2483125" y="580104"/>
+            <a:ext cx="7658370" cy="6342475"/>
+          </a:xfrm>
+          <a:prstGeom prst="rect">
+            <a:avLst/>
+          </a:prstGeom>
+        </p:spPr>
+      </p:pic>
+      <p:sp>
+        <p:nvSpPr>
+          <p:cNvPr id="2" name="Title 1">
+            <a:extLst>
+              <a:ext uri="{FF2B5EF4-FFF2-40B4-BE49-F238E27FC236}">
+                <a16:creationId xmlns:a16="http://schemas.microsoft.com/office/drawing/2014/main" id="{8CFE8FC2-74F4-9BB5-D225-735858BA7BC7}"/>
+              </a:ext>
+            </a:extLst>
+          </p:cNvPr>
+          <p:cNvSpPr>
+            <a:spLocks noGrp="1"/>
+          </p:cNvSpPr>
+          <p:nvPr>
+            <p:ph type="title"/>
+          </p:nvPr>
+        </p:nvSpPr>
+        <p:spPr>
+          <a:xfrm>
+            <a:off x="149942" y="156572"/>
+            <a:ext cx="6162368" cy="423532"/>
+          </a:xfrm>
+        </p:spPr>
+        <p:txBody>
+          <a:bodyPr>
+            <a:normAutofit fontScale="90000"/>
+          </a:bodyPr>
+          <a:lstStyle/>
+          <a:p>
+            <a:r>
+              <a:rPr lang="en-US" dirty="0"/>
+              <a:t>LVNV, T, WT sirtalis</a:t>
+            </a:r>
+          </a:p>
+        </p:txBody>
+      </p:sp>
+    </p:spTree>
+    <p:extLst>
+      <p:ext uri="{BB962C8B-B14F-4D97-AF65-F5344CB8AC3E}">
+        <p14:creationId xmlns:p14="http://schemas.microsoft.com/office/powerpoint/2010/main" val="3596044053"/>
+      </p:ext>
+    </p:extLst>
+  </p:cSld>
+  <p:clrMapOvr>
+    <a:masterClrMapping/>
+  </p:clrMapOvr>
+</p:sld>
+</file>
+
+<file path=ppt/slides/slide7.xml><?xml version="1.0" encoding="utf-8"?>
+<p:sld xmlns:a="http://schemas.openxmlformats.org/drawingml/2006/main" xmlns:r="http://schemas.openxmlformats.org/officeDocument/2006/relationships" xmlns:p="http://schemas.openxmlformats.org/presentationml/2006/main">
+  <p:cSld>
+    <p:spTree>
+      <p:nvGrpSpPr>
+        <p:cNvPr id="1" name=""/>
+        <p:cNvGrpSpPr/>
+        <p:nvPr/>
+      </p:nvGrpSpPr>
+      <p:grpSpPr>
+        <a:xfrm>
+          <a:off x="0" y="0"/>
+          <a:ext cx="0" cy="0"/>
+          <a:chOff x="0" y="0"/>
+          <a:chExt cx="0" cy="0"/>
+        </a:xfrm>
+      </p:grpSpPr>
+      <p:pic>
+        <p:nvPicPr>
+          <p:cNvPr id="29" name="Picture 28">
+            <a:extLst>
+              <a:ext uri="{FF2B5EF4-FFF2-40B4-BE49-F238E27FC236}">
+                <a16:creationId xmlns:a16="http://schemas.microsoft.com/office/drawing/2014/main" id="{2DBBFDC0-9179-B2DE-3509-8AABFAFBB859}"/>
+              </a:ext>
+            </a:extLst>
+          </p:cNvPr>
+          <p:cNvPicPr>
+            <a:picLocks noChangeAspect="1"/>
+          </p:cNvPicPr>
+          <p:nvPr/>
+        </p:nvPicPr>
+        <p:blipFill>
+          <a:blip r:embed="rId3">
+            <a:extLst>
+              <a:ext uri="{28A0092B-C50C-407E-A947-70E740481C1C}">
+                <a14:useLocalDpi xmlns:a14="http://schemas.microsoft.com/office/drawing/2010/main" val="0"/>
+              </a:ext>
+            </a:extLst>
+          </a:blip>
+          <a:stretch>
+            <a:fillRect/>
+          </a:stretch>
+        </p:blipFill>
+        <p:spPr>
+          <a:xfrm>
+            <a:off x="2470331" y="743132"/>
+            <a:ext cx="7251338" cy="6005381"/>
+          </a:xfrm>
+          <a:prstGeom prst="rect">
+            <a:avLst/>
+          </a:prstGeom>
+        </p:spPr>
+      </p:pic>
+      <p:sp>
+        <p:nvSpPr>
+          <p:cNvPr id="3" name="Title 2">
+            <a:extLst>
+              <a:ext uri="{FF2B5EF4-FFF2-40B4-BE49-F238E27FC236}">
+                <a16:creationId xmlns:a16="http://schemas.microsoft.com/office/drawing/2014/main" id="{1B066AFE-3330-875C-2992-77ECA537184C}"/>
+              </a:ext>
+            </a:extLst>
+          </p:cNvPr>
+          <p:cNvSpPr>
+            <a:spLocks noGrp="1"/>
+          </p:cNvSpPr>
+          <p:nvPr>
+            <p:ph type="title"/>
+          </p:nvPr>
+        </p:nvSpPr>
+        <p:spPr>
+          <a:xfrm>
+            <a:off x="130277" y="109487"/>
+            <a:ext cx="9869129" cy="667262"/>
+          </a:xfrm>
+        </p:spPr>
+        <p:txBody>
+          <a:bodyPr>
+            <a:normAutofit fontScale="90000"/>
+          </a:bodyPr>
+          <a:lstStyle/>
+          <a:p>
+            <a:r>
+              <a:rPr lang="en-US" dirty="0"/>
+              <a:t>EPN, LVNV, T, WT sirtalis</a:t>
+            </a:r>
+          </a:p>
+        </p:txBody>
+      </p:sp>
+    </p:spTree>
+    <p:extLst>
+      <p:ext uri="{BB962C8B-B14F-4D97-AF65-F5344CB8AC3E}">
+        <p14:creationId xmlns:p14="http://schemas.microsoft.com/office/powerpoint/2010/main" val="959217749"/>
+      </p:ext>
+    </p:extLst>
+  </p:cSld>
+  <p:clrMapOvr>
+    <a:masterClrMapping/>
+  </p:clrMapOvr>
+</p:sld>
+</file>
+
+<file path=ppt/slides/slide8.xml><?xml version="1.0" encoding="utf-8"?>
+<p:sld xmlns:a="http://schemas.openxmlformats.org/drawingml/2006/main" xmlns:r="http://schemas.openxmlformats.org/officeDocument/2006/relationships" xmlns:p="http://schemas.openxmlformats.org/presentationml/2006/main">
+  <p:cSld>
+    <p:spTree>
+      <p:nvGrpSpPr>
+        <p:cNvPr id="1" name=""/>
+        <p:cNvGrpSpPr/>
+        <p:nvPr/>
+      </p:nvGrpSpPr>
+      <p:grpSpPr>
+        <a:xfrm>
+          <a:off x="0" y="0"/>
+          <a:ext cx="0" cy="0"/>
+          <a:chOff x="0" y="0"/>
+          <a:chExt cx="0" cy="0"/>
+        </a:xfrm>
+      </p:grpSpPr>
+      <p:pic>
+        <p:nvPicPr>
+          <p:cNvPr id="21" name="Picture 20">
+            <a:extLst>
+              <a:ext uri="{FF2B5EF4-FFF2-40B4-BE49-F238E27FC236}">
+                <a16:creationId xmlns:a16="http://schemas.microsoft.com/office/drawing/2014/main" id="{ABBD96AC-A510-4B21-1CAD-CD4AA3181743}"/>
+              </a:ext>
+            </a:extLst>
+          </p:cNvPr>
+          <p:cNvPicPr>
+            <a:picLocks noChangeAspect="1"/>
+          </p:cNvPicPr>
+          <p:nvPr/>
+        </p:nvPicPr>
+        <p:blipFill>
+          <a:blip r:embed="rId3">
+            <a:extLst>
+              <a:ext uri="{28A0092B-C50C-407E-A947-70E740481C1C}">
+                <a14:useLocalDpi xmlns:a14="http://schemas.microsoft.com/office/drawing/2010/main" val="0"/>
+              </a:ext>
+            </a:extLst>
+          </a:blip>
+          <a:stretch>
+            <a:fillRect/>
+          </a:stretch>
+        </p:blipFill>
+        <p:spPr>
+          <a:xfrm>
+            <a:off x="2273570" y="597654"/>
+            <a:ext cx="7644860" cy="6331286"/>
+          </a:xfrm>
+          <a:prstGeom prst="rect">
+            <a:avLst/>
+          </a:prstGeom>
+        </p:spPr>
+      </p:pic>
+      <p:sp>
+        <p:nvSpPr>
+          <p:cNvPr id="2" name="Title 1">
+            <a:extLst>
+              <a:ext uri="{FF2B5EF4-FFF2-40B4-BE49-F238E27FC236}">
+                <a16:creationId xmlns:a16="http://schemas.microsoft.com/office/drawing/2014/main" id="{9E1B3FD0-DCB1-7C76-EB70-5B896BA4D7A4}"/>
+              </a:ext>
+            </a:extLst>
+          </p:cNvPr>
+          <p:cNvSpPr>
+            <a:spLocks noGrp="1"/>
+          </p:cNvSpPr>
+          <p:nvPr>
+            <p:ph type="title"/>
+          </p:nvPr>
+        </p:nvSpPr>
+        <p:spPr>
+          <a:xfrm>
+            <a:off x="159774" y="263357"/>
+            <a:ext cx="9080230" cy="175649"/>
+          </a:xfrm>
+        </p:spPr>
+        <p:txBody>
+          <a:bodyPr>
+            <a:normAutofit fontScale="90000"/>
+          </a:bodyPr>
+          <a:lstStyle/>
+          <a:p>
+            <a:r>
+              <a:rPr lang="en-US" dirty="0"/>
+              <a:t>T, LVNV, WT sirtalis, </a:t>
+            </a:r>
+            <a:r>
+              <a:rPr lang="en-US" dirty="0" err="1"/>
+              <a:t>hammondii</a:t>
+            </a:r>
+            <a:endParaRPr lang="en-US" dirty="0"/>
+          </a:p>
+        </p:txBody>
+      </p:sp>
+    </p:spTree>
+    <p:extLst>
+      <p:ext uri="{BB962C8B-B14F-4D97-AF65-F5344CB8AC3E}">
+        <p14:creationId xmlns:p14="http://schemas.microsoft.com/office/powerpoint/2010/main" val="3843965665"/>
+      </p:ext>
+    </p:extLst>
+  </p:cSld>
+  <p:clrMapOvr>
+    <a:masterClrMapping/>
+  </p:clrMapOvr>
+</p:sld>
+</file>
+
+<file path=ppt/slides/slide9.xml><?xml version="1.0" encoding="utf-8"?>
+<p:sld xmlns:a="http://schemas.openxmlformats.org/drawingml/2006/main" xmlns:r="http://schemas.openxmlformats.org/officeDocument/2006/relationships" xmlns:p="http://schemas.openxmlformats.org/presentationml/2006/main">
+  <p:cSld>
+    <p:spTree>
+      <p:nvGrpSpPr>
+        <p:cNvPr id="1" name=""/>
+        <p:cNvGrpSpPr/>
+        <p:nvPr/>
+      </p:nvGrpSpPr>
+      <p:grpSpPr>
+        <a:xfrm>
+          <a:off x="0" y="0"/>
+          <a:ext cx="0" cy="0"/>
+          <a:chOff x="0" y="0"/>
+          <a:chExt cx="0" cy="0"/>
+        </a:xfrm>
+      </p:grpSpPr>
+      <p:pic>
+        <p:nvPicPr>
+          <p:cNvPr id="23" name="Picture 22">
+            <a:extLst>
+              <a:ext uri="{FF2B5EF4-FFF2-40B4-BE49-F238E27FC236}">
+                <a16:creationId xmlns:a16="http://schemas.microsoft.com/office/drawing/2014/main" id="{20FF2F85-7B1C-51EB-2A21-E2C82DD1DB61}"/>
+              </a:ext>
+            </a:extLst>
+          </p:cNvPr>
+          <p:cNvPicPr>
+            <a:picLocks noChangeAspect="1"/>
+          </p:cNvPicPr>
+          <p:nvPr/>
+        </p:nvPicPr>
+        <p:blipFill>
+          <a:blip r:embed="rId3">
+            <a:extLst>
+              <a:ext uri="{28A0092B-C50C-407E-A947-70E740481C1C}">
+                <a14:useLocalDpi xmlns:a14="http://schemas.microsoft.com/office/drawing/2010/main" val="0"/>
+              </a:ext>
+            </a:extLst>
+          </a:blip>
+          <a:stretch>
+            <a:fillRect/>
+          </a:stretch>
+        </p:blipFill>
+        <p:spPr>
+          <a:xfrm>
+            <a:off x="2191850" y="529312"/>
+            <a:ext cx="7808299" cy="6466642"/>
+          </a:xfrm>
+          <a:prstGeom prst="rect">
+            <a:avLst/>
+          </a:prstGeom>
+        </p:spPr>
+      </p:pic>
+      <p:pic>
+        <p:nvPicPr>
+          <p:cNvPr id="4" name="Picture 3">
+            <a:extLst>
+              <a:ext uri="{FF2B5EF4-FFF2-40B4-BE49-F238E27FC236}">
+                <a16:creationId xmlns:a16="http://schemas.microsoft.com/office/drawing/2014/main" id="{B11CAAF9-DF87-20B5-B87E-C1F8AE1B399C}"/>
+              </a:ext>
+            </a:extLst>
+          </p:cNvPr>
+          <p:cNvPicPr>
+            <a:picLocks noChangeAspect="1"/>
+          </p:cNvPicPr>
+          <p:nvPr/>
+        </p:nvPicPr>
+        <p:blipFill>
+          <a:blip r:embed="rId4"/>
+          <a:stretch>
+            <a:fillRect/>
+          </a:stretch>
+        </p:blipFill>
+        <p:spPr>
+          <a:xfrm>
+            <a:off x="-165093" y="-86075"/>
+            <a:ext cx="9297206" cy="1072989"/>
+          </a:xfrm>
+          <a:prstGeom prst="rect">
+            <a:avLst/>
+          </a:prstGeom>
+        </p:spPr>
+      </p:pic>
+    </p:spTree>
+    <p:extLst>
+      <p:ext uri="{BB962C8B-B14F-4D97-AF65-F5344CB8AC3E}">
+        <p14:creationId xmlns:p14="http://schemas.microsoft.com/office/powerpoint/2010/main" val="692453888"/>
       </p:ext>
     </p:extLst>
   </p:cSld>

--- a/Presentations/Draft plots for myography trade-off work.pptx
+++ b/Presentations/Draft plots for myography trade-off work.pptx
@@ -5,7 +5,7 @@
     <p:sldMasterId id="2147483648" r:id="rId1"/>
   </p:sldMasterIdLst>
   <p:notesMasterIdLst>
-    <p:notesMasterId r:id="rId24"/>
+    <p:notesMasterId r:id="rId26"/>
   </p:notesMasterIdLst>
   <p:sldIdLst>
     <p:sldId id="274" r:id="rId2"/>
@@ -30,6 +30,8 @@
     <p:sldId id="268" r:id="rId21"/>
     <p:sldId id="270" r:id="rId22"/>
     <p:sldId id="273" r:id="rId23"/>
+    <p:sldId id="279" r:id="rId24"/>
+    <p:sldId id="280" r:id="rId25"/>
   </p:sldIdLst>
   <p:sldSz cx="12192000" cy="6858000"/>
   <p:notesSz cx="6858000" cy="9144000"/>
@@ -218,7 +220,7 @@
           <a:p>
             <a:fld id="{3930ABBD-3C32-42F1-9CAF-983C4BE0028E}" type="datetimeFigureOut">
               <a:rPr lang="en-US" smtClean="0"/>
-              <a:t>6/10/2026</a:t>
+              <a:t>6/12/2026</a:t>
             </a:fld>
             <a:endParaRPr lang="en-US"/>
           </a:p>
@@ -1012,6 +1014,180 @@
 </p:notes>
 </file>
 
+<file path=ppt/notesSlides/notesSlide15.xml><?xml version="1.0" encoding="utf-8"?>
+<p:notes xmlns:a="http://schemas.openxmlformats.org/drawingml/2006/main" xmlns:r="http://schemas.openxmlformats.org/officeDocument/2006/relationships" xmlns:p="http://schemas.openxmlformats.org/presentationml/2006/main">
+  <p:cSld>
+    <p:spTree>
+      <p:nvGrpSpPr>
+        <p:cNvPr id="1" name=""/>
+        <p:cNvGrpSpPr/>
+        <p:nvPr/>
+      </p:nvGrpSpPr>
+      <p:grpSpPr>
+        <a:xfrm>
+          <a:off x="0" y="0"/>
+          <a:ext cx="0" cy="0"/>
+          <a:chOff x="0" y="0"/>
+          <a:chExt cx="0" cy="0"/>
+        </a:xfrm>
+      </p:grpSpPr>
+      <p:sp>
+        <p:nvSpPr>
+          <p:cNvPr id="2" name="Slide Image Placeholder 1"/>
+          <p:cNvSpPr>
+            <a:spLocks noGrp="1" noRot="1" noChangeAspect="1"/>
+          </p:cNvSpPr>
+          <p:nvPr>
+            <p:ph type="sldImg"/>
+          </p:nvPr>
+        </p:nvSpPr>
+        <p:spPr/>
+      </p:sp>
+      <p:sp>
+        <p:nvSpPr>
+          <p:cNvPr id="3" name="Notes Placeholder 2"/>
+          <p:cNvSpPr>
+            <a:spLocks noGrp="1"/>
+          </p:cNvSpPr>
+          <p:nvPr>
+            <p:ph type="body" idx="1"/>
+          </p:nvPr>
+        </p:nvSpPr>
+        <p:spPr/>
+        <p:txBody>
+          <a:bodyPr/>
+          <a:lstStyle/>
+          <a:p>
+            <a:r>
+              <a:rPr lang="en-US" dirty="0"/>
+              <a:t>Plot shows average stimulus strength required to get a half-maximal contraction at different pulse widths; it was truncated to show differences because values become comparable across groups at higher pulse widths. Despite apparent visual differences, none of these curves are statistically different (I need to double-check my curve fitting algorithms and try overlaying the raw data before being confident in that)</a:t>
+            </a:r>
+          </a:p>
+        </p:txBody>
+      </p:sp>
+      <p:sp>
+        <p:nvSpPr>
+          <p:cNvPr id="4" name="Slide Number Placeholder 3"/>
+          <p:cNvSpPr>
+            <a:spLocks noGrp="1"/>
+          </p:cNvSpPr>
+          <p:nvPr>
+            <p:ph type="sldNum" sz="quarter" idx="5"/>
+          </p:nvPr>
+        </p:nvSpPr>
+        <p:spPr/>
+        <p:txBody>
+          <a:bodyPr/>
+          <a:lstStyle/>
+          <a:p>
+            <a:fld id="{F7EB3A0C-D451-48F2-9233-B0BC11E987C5}" type="slidenum">
+              <a:rPr lang="en-US" smtClean="0"/>
+              <a:t>23</a:t>
+            </a:fld>
+            <a:endParaRPr lang="en-US"/>
+          </a:p>
+        </p:txBody>
+      </p:sp>
+    </p:spTree>
+    <p:extLst>
+      <p:ext uri="{BB962C8B-B14F-4D97-AF65-F5344CB8AC3E}">
+        <p14:creationId xmlns:p14="http://schemas.microsoft.com/office/powerpoint/2010/main" val="1116115212"/>
+      </p:ext>
+    </p:extLst>
+  </p:cSld>
+  <p:clrMapOvr>
+    <a:masterClrMapping/>
+  </p:clrMapOvr>
+</p:notes>
+</file>
+
+<file path=ppt/notesSlides/notesSlide16.xml><?xml version="1.0" encoding="utf-8"?>
+<p:notes xmlns:a="http://schemas.openxmlformats.org/drawingml/2006/main" xmlns:r="http://schemas.openxmlformats.org/officeDocument/2006/relationships" xmlns:p="http://schemas.openxmlformats.org/presentationml/2006/main">
+  <p:cSld>
+    <p:spTree>
+      <p:nvGrpSpPr>
+        <p:cNvPr id="1" name=""/>
+        <p:cNvGrpSpPr/>
+        <p:nvPr/>
+      </p:nvGrpSpPr>
+      <p:grpSpPr>
+        <a:xfrm>
+          <a:off x="0" y="0"/>
+          <a:ext cx="0" cy="0"/>
+          <a:chOff x="0" y="0"/>
+          <a:chExt cx="0" cy="0"/>
+        </a:xfrm>
+      </p:grpSpPr>
+      <p:sp>
+        <p:nvSpPr>
+          <p:cNvPr id="2" name="Slide Image Placeholder 1"/>
+          <p:cNvSpPr>
+            <a:spLocks noGrp="1" noRot="1" noChangeAspect="1"/>
+          </p:cNvSpPr>
+          <p:nvPr>
+            <p:ph type="sldImg"/>
+          </p:nvPr>
+        </p:nvSpPr>
+        <p:spPr/>
+      </p:sp>
+      <p:sp>
+        <p:nvSpPr>
+          <p:cNvPr id="3" name="Notes Placeholder 2"/>
+          <p:cNvSpPr>
+            <a:spLocks noGrp="1"/>
+          </p:cNvSpPr>
+          <p:nvPr>
+            <p:ph type="body" idx="1"/>
+          </p:nvPr>
+        </p:nvSpPr>
+        <p:spPr/>
+        <p:txBody>
+          <a:bodyPr/>
+          <a:lstStyle/>
+          <a:p>
+            <a:r>
+              <a:rPr lang="en-US" dirty="0"/>
+              <a:t>Same as previous plot but the x axis is on a log 10 scale so we don’t have to truncate it; this is more true to how these curves are typically presented in the literature although I haven’t made the axes labels more easily interpretable yet. Underlying data is all the same though.</a:t>
+            </a:r>
+          </a:p>
+        </p:txBody>
+      </p:sp>
+      <p:sp>
+        <p:nvSpPr>
+          <p:cNvPr id="4" name="Slide Number Placeholder 3"/>
+          <p:cNvSpPr>
+            <a:spLocks noGrp="1"/>
+          </p:cNvSpPr>
+          <p:nvPr>
+            <p:ph type="sldNum" sz="quarter" idx="5"/>
+          </p:nvPr>
+        </p:nvSpPr>
+        <p:spPr/>
+        <p:txBody>
+          <a:bodyPr/>
+          <a:lstStyle/>
+          <a:p>
+            <a:fld id="{F7EB3A0C-D451-48F2-9233-B0BC11E987C5}" type="slidenum">
+              <a:rPr lang="en-US" smtClean="0"/>
+              <a:t>24</a:t>
+            </a:fld>
+            <a:endParaRPr lang="en-US"/>
+          </a:p>
+        </p:txBody>
+      </p:sp>
+    </p:spTree>
+    <p:extLst>
+      <p:ext uri="{BB962C8B-B14F-4D97-AF65-F5344CB8AC3E}">
+        <p14:creationId xmlns:p14="http://schemas.microsoft.com/office/powerpoint/2010/main" val="1411268037"/>
+      </p:ext>
+    </p:extLst>
+  </p:cSld>
+  <p:clrMapOvr>
+    <a:masterClrMapping/>
+  </p:clrMapOvr>
+</p:notes>
+</file>
+
 <file path=ppt/notesSlides/notesSlide2.xml><?xml version="1.0" encoding="utf-8"?>
 <p:notes xmlns:a="http://schemas.openxmlformats.org/drawingml/2006/main" xmlns:r="http://schemas.openxmlformats.org/officeDocument/2006/relationships" xmlns:p="http://schemas.openxmlformats.org/presentationml/2006/main">
   <p:cSld>
@@ -1916,7 +2092,7 @@
           <a:p>
             <a:fld id="{8D0B3E90-267C-48FC-B90C-EF83BC81CA30}" type="datetimeFigureOut">
               <a:rPr lang="en-US" smtClean="0"/>
-              <a:t>6/10/2026</a:t>
+              <a:t>6/12/2026</a:t>
             </a:fld>
             <a:endParaRPr lang="en-US"/>
           </a:p>
@@ -2114,7 +2290,7 @@
           <a:p>
             <a:fld id="{8D0B3E90-267C-48FC-B90C-EF83BC81CA30}" type="datetimeFigureOut">
               <a:rPr lang="en-US" smtClean="0"/>
-              <a:t>6/10/2026</a:t>
+              <a:t>6/12/2026</a:t>
             </a:fld>
             <a:endParaRPr lang="en-US"/>
           </a:p>
@@ -2322,7 +2498,7 @@
           <a:p>
             <a:fld id="{8D0B3E90-267C-48FC-B90C-EF83BC81CA30}" type="datetimeFigureOut">
               <a:rPr lang="en-US" smtClean="0"/>
-              <a:t>6/10/2026</a:t>
+              <a:t>6/12/2026</a:t>
             </a:fld>
             <a:endParaRPr lang="en-US"/>
           </a:p>
@@ -2520,7 +2696,7 @@
           <a:p>
             <a:fld id="{8D0B3E90-267C-48FC-B90C-EF83BC81CA30}" type="datetimeFigureOut">
               <a:rPr lang="en-US" smtClean="0"/>
-              <a:t>6/10/2026</a:t>
+              <a:t>6/12/2026</a:t>
             </a:fld>
             <a:endParaRPr lang="en-US"/>
           </a:p>
@@ -2795,7 +2971,7 @@
           <a:p>
             <a:fld id="{8D0B3E90-267C-48FC-B90C-EF83BC81CA30}" type="datetimeFigureOut">
               <a:rPr lang="en-US" smtClean="0"/>
-              <a:t>6/10/2026</a:t>
+              <a:t>6/12/2026</a:t>
             </a:fld>
             <a:endParaRPr lang="en-US"/>
           </a:p>
@@ -3060,7 +3236,7 @@
           <a:p>
             <a:fld id="{8D0B3E90-267C-48FC-B90C-EF83BC81CA30}" type="datetimeFigureOut">
               <a:rPr lang="en-US" smtClean="0"/>
-              <a:t>6/10/2026</a:t>
+              <a:t>6/12/2026</a:t>
             </a:fld>
             <a:endParaRPr lang="en-US"/>
           </a:p>
@@ -3472,7 +3648,7 @@
           <a:p>
             <a:fld id="{8D0B3E90-267C-48FC-B90C-EF83BC81CA30}" type="datetimeFigureOut">
               <a:rPr lang="en-US" smtClean="0"/>
-              <a:t>6/10/2026</a:t>
+              <a:t>6/12/2026</a:t>
             </a:fld>
             <a:endParaRPr lang="en-US"/>
           </a:p>
@@ -3613,7 +3789,7 @@
           <a:p>
             <a:fld id="{8D0B3E90-267C-48FC-B90C-EF83BC81CA30}" type="datetimeFigureOut">
               <a:rPr lang="en-US" smtClean="0"/>
-              <a:t>6/10/2026</a:t>
+              <a:t>6/12/2026</a:t>
             </a:fld>
             <a:endParaRPr lang="en-US"/>
           </a:p>
@@ -3726,7 +3902,7 @@
           <a:p>
             <a:fld id="{8D0B3E90-267C-48FC-B90C-EF83BC81CA30}" type="datetimeFigureOut">
               <a:rPr lang="en-US" smtClean="0"/>
-              <a:t>6/10/2026</a:t>
+              <a:t>6/12/2026</a:t>
             </a:fld>
             <a:endParaRPr lang="en-US"/>
           </a:p>
@@ -4037,7 +4213,7 @@
           <a:p>
             <a:fld id="{8D0B3E90-267C-48FC-B90C-EF83BC81CA30}" type="datetimeFigureOut">
               <a:rPr lang="en-US" smtClean="0"/>
-              <a:t>6/10/2026</a:t>
+              <a:t>6/12/2026</a:t>
             </a:fld>
             <a:endParaRPr lang="en-US"/>
           </a:p>
@@ -4325,7 +4501,7 @@
           <a:p>
             <a:fld id="{8D0B3E90-267C-48FC-B90C-EF83BC81CA30}" type="datetimeFigureOut">
               <a:rPr lang="en-US" smtClean="0"/>
-              <a:t>6/10/2026</a:t>
+              <a:t>6/12/2026</a:t>
             </a:fld>
             <a:endParaRPr lang="en-US"/>
           </a:p>
@@ -4566,7 +4742,7 @@
           <a:p>
             <a:fld id="{8D0B3E90-267C-48FC-B90C-EF83BC81CA30}" type="datetimeFigureOut">
               <a:rPr lang="en-US" smtClean="0"/>
-              <a:t>6/10/2026</a:t>
+              <a:t>6/12/2026</a:t>
             </a:fld>
             <a:endParaRPr lang="en-US"/>
           </a:p>
@@ -6489,10 +6665,10 @@
       </p:sp>
       <p:sp>
         <p:nvSpPr>
-          <p:cNvPr id="4" name="Text Placeholder 3">
-            <a:extLst>
-              <a:ext uri="{FF2B5EF4-FFF2-40B4-BE49-F238E27FC236}">
-                <a16:creationId xmlns:a16="http://schemas.microsoft.com/office/drawing/2014/main" id="{B9F7088C-394E-DDDE-A7B3-3A0D1F4BD1B2}"/>
+          <p:cNvPr id="5" name="Text Placeholder 4">
+            <a:extLst>
+              <a:ext uri="{FF2B5EF4-FFF2-40B4-BE49-F238E27FC236}">
+                <a16:creationId xmlns:a16="http://schemas.microsoft.com/office/drawing/2014/main" id="{FC6D5E0E-32F9-6164-BA32-BBB557A780A5}"/>
               </a:ext>
             </a:extLst>
           </p:cNvPr>
@@ -6505,14 +6681,28 @@
         </p:nvSpPr>
         <p:spPr/>
         <p:txBody>
-          <a:bodyPr>
-            <a:normAutofit fontScale="92500"/>
-          </a:bodyPr>
+          <a:bodyPr/>
           <a:lstStyle/>
           <a:p>
             <a:r>
               <a:rPr lang="en-US" dirty="0"/>
-              <a:t>I did not get here because I was over-ambitious and also had to redo all the previous plots multiple times because of a series of silly errors but I will also have this before our next meeting (hopefully by the end of the week if you’re curious and want to see them sooner, we can probably meet via zoom while I’m gone if you want)</a:t>
+              <a:t>No WT atratus on these plots yet because their files are all in .</a:t>
+            </a:r>
+            <a:r>
+              <a:rPr lang="en-US" dirty="0" err="1"/>
+              <a:t>dat</a:t>
+            </a:r>
+            <a:r>
+              <a:rPr lang="en-US" dirty="0"/>
+              <a:t> and/or .</a:t>
+            </a:r>
+            <a:r>
+              <a:rPr lang="en-US" dirty="0" err="1"/>
+              <a:t>ddf</a:t>
+            </a:r>
+            <a:r>
+              <a:rPr lang="en-US" dirty="0"/>
+              <a:t> format and I can’t open them</a:t>
             </a:r>
           </a:p>
         </p:txBody>
@@ -6521,6 +6711,204 @@
     <p:extLst>
       <p:ext uri="{BB962C8B-B14F-4D97-AF65-F5344CB8AC3E}">
         <p14:creationId xmlns:p14="http://schemas.microsoft.com/office/powerpoint/2010/main" val="2411144924"/>
+      </p:ext>
+    </p:extLst>
+  </p:cSld>
+  <p:clrMapOvr>
+    <a:masterClrMapping/>
+  </p:clrMapOvr>
+</p:sld>
+</file>
+
+<file path=ppt/slides/slide23.xml><?xml version="1.0" encoding="utf-8"?>
+<p:sld xmlns:a="http://schemas.openxmlformats.org/drawingml/2006/main" xmlns:r="http://schemas.openxmlformats.org/officeDocument/2006/relationships" xmlns:p="http://schemas.openxmlformats.org/presentationml/2006/main">
+  <p:cSld>
+    <p:spTree>
+      <p:nvGrpSpPr>
+        <p:cNvPr id="1" name=""/>
+        <p:cNvGrpSpPr/>
+        <p:nvPr/>
+      </p:nvGrpSpPr>
+      <p:grpSpPr>
+        <a:xfrm>
+          <a:off x="0" y="0"/>
+          <a:ext cx="0" cy="0"/>
+          <a:chOff x="0" y="0"/>
+          <a:chExt cx="0" cy="0"/>
+        </a:xfrm>
+      </p:grpSpPr>
+      <p:sp>
+        <p:nvSpPr>
+          <p:cNvPr id="4" name="Title 3">
+            <a:extLst>
+              <a:ext uri="{FF2B5EF4-FFF2-40B4-BE49-F238E27FC236}">
+                <a16:creationId xmlns:a16="http://schemas.microsoft.com/office/drawing/2014/main" id="{A17EF328-D455-4F16-90B0-04D16A3A61A4}"/>
+              </a:ext>
+            </a:extLst>
+          </p:cNvPr>
+          <p:cNvSpPr>
+            <a:spLocks noGrp="1"/>
+          </p:cNvSpPr>
+          <p:nvPr>
+            <p:ph type="title"/>
+          </p:nvPr>
+        </p:nvSpPr>
+        <p:spPr>
+          <a:xfrm>
+            <a:off x="214489" y="-118727"/>
+            <a:ext cx="10515600" cy="1325563"/>
+          </a:xfrm>
+        </p:spPr>
+        <p:txBody>
+          <a:bodyPr/>
+          <a:lstStyle/>
+          <a:p>
+            <a:r>
+              <a:rPr lang="en-US" dirty="0"/>
+              <a:t>Average strength-duration curve</a:t>
+            </a:r>
+          </a:p>
+        </p:txBody>
+      </p:sp>
+      <p:pic>
+        <p:nvPicPr>
+          <p:cNvPr id="6" name="Picture 5">
+            <a:extLst>
+              <a:ext uri="{FF2B5EF4-FFF2-40B4-BE49-F238E27FC236}">
+                <a16:creationId xmlns:a16="http://schemas.microsoft.com/office/drawing/2014/main" id="{D9E272CF-3D87-682A-DFDE-BFD518A7DDC6}"/>
+              </a:ext>
+            </a:extLst>
+          </p:cNvPr>
+          <p:cNvPicPr>
+            <a:picLocks noChangeAspect="1"/>
+          </p:cNvPicPr>
+          <p:nvPr/>
+        </p:nvPicPr>
+        <p:blipFill>
+          <a:blip r:embed="rId3">
+            <a:extLst>
+              <a:ext uri="{28A0092B-C50C-407E-A947-70E740481C1C}">
+                <a14:useLocalDpi xmlns:a14="http://schemas.microsoft.com/office/drawing/2010/main" val="0"/>
+              </a:ext>
+            </a:extLst>
+          </a:blip>
+          <a:stretch>
+            <a:fillRect/>
+          </a:stretch>
+        </p:blipFill>
+        <p:spPr>
+          <a:xfrm>
+            <a:off x="2310831" y="1206836"/>
+            <a:ext cx="8142680" cy="5587766"/>
+          </a:xfrm>
+          <a:prstGeom prst="rect">
+            <a:avLst/>
+          </a:prstGeom>
+        </p:spPr>
+      </p:pic>
+    </p:spTree>
+    <p:extLst>
+      <p:ext uri="{BB962C8B-B14F-4D97-AF65-F5344CB8AC3E}">
+        <p14:creationId xmlns:p14="http://schemas.microsoft.com/office/powerpoint/2010/main" val="1920599124"/>
+      </p:ext>
+    </p:extLst>
+  </p:cSld>
+  <p:clrMapOvr>
+    <a:masterClrMapping/>
+  </p:clrMapOvr>
+</p:sld>
+</file>
+
+<file path=ppt/slides/slide24.xml><?xml version="1.0" encoding="utf-8"?>
+<p:sld xmlns:a="http://schemas.openxmlformats.org/drawingml/2006/main" xmlns:r="http://schemas.openxmlformats.org/officeDocument/2006/relationships" xmlns:p="http://schemas.openxmlformats.org/presentationml/2006/main">
+  <p:cSld>
+    <p:spTree>
+      <p:nvGrpSpPr>
+        <p:cNvPr id="1" name=""/>
+        <p:cNvGrpSpPr/>
+        <p:nvPr/>
+      </p:nvGrpSpPr>
+      <p:grpSpPr>
+        <a:xfrm>
+          <a:off x="0" y="0"/>
+          <a:ext cx="0" cy="0"/>
+          <a:chOff x="0" y="0"/>
+          <a:chExt cx="0" cy="0"/>
+        </a:xfrm>
+      </p:grpSpPr>
+      <p:sp>
+        <p:nvSpPr>
+          <p:cNvPr id="2" name="Title 1">
+            <a:extLst>
+              <a:ext uri="{FF2B5EF4-FFF2-40B4-BE49-F238E27FC236}">
+                <a16:creationId xmlns:a16="http://schemas.microsoft.com/office/drawing/2014/main" id="{65527125-B4C4-ED95-7116-2C1DB3D81F9F}"/>
+              </a:ext>
+            </a:extLst>
+          </p:cNvPr>
+          <p:cNvSpPr>
+            <a:spLocks noGrp="1"/>
+          </p:cNvSpPr>
+          <p:nvPr>
+            <p:ph type="title"/>
+          </p:nvPr>
+        </p:nvSpPr>
+        <p:spPr>
+          <a:xfrm>
+            <a:off x="115711" y="-221897"/>
+            <a:ext cx="10515600" cy="1325563"/>
+          </a:xfrm>
+        </p:spPr>
+        <p:txBody>
+          <a:bodyPr/>
+          <a:lstStyle/>
+          <a:p>
+            <a:r>
+              <a:rPr lang="en-US" dirty="0"/>
+              <a:t>Log strength-duration curve</a:t>
+            </a:r>
+          </a:p>
+        </p:txBody>
+      </p:sp>
+      <p:pic>
+        <p:nvPicPr>
+          <p:cNvPr id="4" name="Picture 3">
+            <a:extLst>
+              <a:ext uri="{FF2B5EF4-FFF2-40B4-BE49-F238E27FC236}">
+                <a16:creationId xmlns:a16="http://schemas.microsoft.com/office/drawing/2014/main" id="{FFC8C937-FCC6-35F3-7B2A-599F9D6FA4FA}"/>
+              </a:ext>
+            </a:extLst>
+          </p:cNvPr>
+          <p:cNvPicPr>
+            <a:picLocks noChangeAspect="1"/>
+          </p:cNvPicPr>
+          <p:nvPr/>
+        </p:nvPicPr>
+        <p:blipFill>
+          <a:blip r:embed="rId3">
+            <a:extLst>
+              <a:ext uri="{28A0092B-C50C-407E-A947-70E740481C1C}">
+                <a14:useLocalDpi xmlns:a14="http://schemas.microsoft.com/office/drawing/2010/main" val="0"/>
+              </a:ext>
+            </a:extLst>
+          </a:blip>
+          <a:stretch>
+            <a:fillRect/>
+          </a:stretch>
+        </p:blipFill>
+        <p:spPr>
+          <a:xfrm>
+            <a:off x="1981200" y="948496"/>
+            <a:ext cx="8229600" cy="5647414"/>
+          </a:xfrm>
+          <a:prstGeom prst="rect">
+            <a:avLst/>
+          </a:prstGeom>
+        </p:spPr>
+      </p:pic>
+    </p:spTree>
+    <p:extLst>
+      <p:ext uri="{BB962C8B-B14F-4D97-AF65-F5344CB8AC3E}">
+        <p14:creationId xmlns:p14="http://schemas.microsoft.com/office/powerpoint/2010/main" val="253612199"/>
       </p:ext>
     </p:extLst>
   </p:cSld>
